--- a/docs/slides.pptx
+++ b/docs/slides.pptx
@@ -27,6 +27,14 @@
     <p:sldId id="275" r:id="rId27"/>
     <p:sldId id="276" r:id="rId28"/>
     <p:sldId id="277" r:id="rId29"/>
+    <p:sldId id="278" r:id="rId30"/>
+    <p:sldId id="279" r:id="rId31"/>
+    <p:sldId id="280" r:id="rId32"/>
+    <p:sldId id="281" r:id="rId33"/>
+    <p:sldId id="282" r:id="rId34"/>
+    <p:sldId id="283" r:id="rId35"/>
+    <p:sldId id="284" r:id="rId36"/>
+    <p:sldId id="285" r:id="rId37"/>
   </p:sldIdLst>
   <p:sldSz cx="12191695" cy="6858000" type="screen4x3"/>
   <p:notesSz cx="6858000" cy="9144000"/>
@@ -523,7 +531,7 @@
           <a:lstStyle/>
           <a:p>
             <a:r>
-              <a:t>Before a computer can improve how a chip is split, it needs a first split. That first split is called the initial bipartition. You will meet three ways to build one: random, greedy and grow. You will see the same small graph get a cut of three, or a cut of sixteen. And you will learn the simple habit that fixes it: try several starts, and keep the best.</a:t>
+              <a:t>Before a computer can improve how a chip is split, it needs a first split, called the initial bipartition. You will meet three ways to build one: random, greedy and grow. On one small graph, they give cuts from three to sixteen. The habit that fixes it: try several starts, keep the best.</a:t>
             </a:r>
           </a:p>
         </p:txBody>
@@ -593,7 +601,7 @@
           <a:lstStyle/>
           <a:p>
             <a:r>
-              <a:t>Now let's see how bad luck can get. With seed three, the shuffle deals B and D to one side. A, C and E end up on the other side. Let's add up the cut, edge by edge. A–B five, B–C four, C–D two and D–E five: sixteen in total. Both heavy edges are cut, so this is the worst legal split of all. Out of the sixteen seeds we tried, only three give the best cut of three.</a:t>
+              <a:t>Recipe three is grow: a side spreads from one start node, like a drop of ink on paper. Start from D. The heaviest edge leaving D goes to E, so E joins. Two cells are enough, so the side stops. A, B and C form the other side: cut three again.</a:t>
             </a:r>
           </a:p>
         </p:txBody>
@@ -663,7 +671,7 @@
           <a:lstStyle/>
           <a:p>
             <a:r>
-              <a:t>Grow has no luck in it, but it has a choice: the start node. Start from A instead of D. The heaviest edge out of A goes to B, with weight five, so B joins A. With two cells, the side is full, and it stops. Now C, D and E form the other side, so A–C and B–C are cut. One plus four makes five, which is worse than three. Starting from C is even worse: a cutsize of nine.</a:t>
+              <a:t>All three found cut three. Pause and guess: was that luck?</a:t>
             </a:r>
           </a:p>
         </p:txBody>
@@ -733,7 +741,7 @@
           <a:lstStyle/>
           <a:p>
             <a:r>
-              <a:t>The fix is simple: never trust a single start. Build several: a few random seeds, greedy, and grow from every node. Throw away any split that breaks the size rule. Keep the one with the smallest cut. On our graph, greedy and the five grows give three, five, five, nine, three and three. The best is three: A, B and C against D and E.</a:t>
+              <a:t>A single unlucky shuffle can make the cut more than five times worse. So yes, it was partly luck. With seed three, B and D land on one side, and A, C and E on the other.</a:t>
             </a:r>
           </a:p>
         </p:txBody>
@@ -803,7 +811,7 @@
           <a:lstStyle/>
           <a:p>
             <a:r>
-              <a:t>Here is a star: A sits in the middle, wired to every other cell. A–B weighs nine, and the four other edges weigh five. With six cells, each side must hold exactly three. An older greedy had no size limit, so it kept adding cells next to A. It ended with five cells against one: cutsize five, but not legal. Our greedy stops each side at three cells, and gets fifteen. No legal split of this star does better.</a:t>
+              <a:t>Let's add up the cut, edge by edge. A–B five, B–C four, C–D two, and D–E five. That makes sixteen.</a:t>
             </a:r>
           </a:p>
         </p:txBody>
@@ -873,7 +881,7 @@
           <a:lstStyle/>
           <a:p>
             <a:r>
-              <a:t>In this graph, A–B and D–E both weigh five again. Greedy must pick one of them to start from. The rule picks the smaller name, A–B, and that gives a cutsize of nine. Starting from D–E instead gives a cutsize of four. So a simple tie rule more than doubled the cut. Grow from C also finds four, which is one more reason to try several starts.</a:t>
+              <a:t>Both heavy edges are cut, so this is the worst legal split of all. Over sixteen seeds, the cut goes from three to sixteen. Only three of those seeds hit the best cut, three.</a:t>
             </a:r>
           </a:p>
         </p:txBody>
@@ -943,7 +951,7 @@
           <a:lstStyle/>
           <a:p>
             <a:r>
-              <a:t>Here are two triangles, joined by one bridge, C–D, with weight four. Every triangle edge weighs three. The natural split puts one triangle on each side, and cuts only the bridge. But greedy starts from the heaviest edge, and here that is the bridge itself. So C and D begin on the same side, and the cut ends up at twelve. Grow from A keeps its triangle together, and cuts only the bridge: four.</a:t>
+              <a:t>Grow has no luck in it, but it has a choice: the start node. Let's start from A instead of D.</a:t>
             </a:r>
           </a:p>
         </p:txBody>
@@ -1013,7 +1021,7 @@
           <a:lstStyle/>
           <a:p>
             <a:r>
-              <a:t>In the browser lab, you work on the same small graph. You can move cells from one side to the other, and watch the cutsize and the balance change. You can also run random, greedy and grow, and compare their cuts. The challenges check the split you built, not the button you clicked. For example, find the start node that gives the smallest cut.</a:t>
+              <a:t>The heaviest edge leaving A goes to B, with weight five, so B joins A. With two cells, the side is full, and it stops.</a:t>
             </a:r>
           </a:p>
         </p:txBody>
@@ -1083,7 +1091,7 @@
           <a:lstStyle/>
           <a:p>
             <a:r>
-              <a:t>If you like programming, write the three methods in Python. The examples file gives the exact rules, including how to break ties. First, run the checker to print every correct answer. Then write your own functions, and run the checker on your file. It also feeds the graph in reverse order, so a missing tie rule shows up as a failure.</a:t>
+              <a:t>C, D and E form the other side, so A–C and B–C are cut. One plus four makes five, which is worse than three. Starting from C is even worse: a cut of nine.</a:t>
             </a:r>
           </a:p>
         </p:txBody>
@@ -1153,7 +1161,7 @@
           <a:lstStyle/>
           <a:p>
             <a:r>
-              <a:t>Watch out for four common mistakes. Reporting the cutsize without the balance. Letting one side grow past its limit, which makes the cut look better than it really is. Trusting a single random seed: on our graph, the cut ranged from three to sixteen. And breaking ties by the order of the input, so the answer changes when the file changes.</a:t>
+              <a:t>The fix is simple: try several starts, keep the best. Build a few random seeds, greedy, and grow from every node. Drop any split that breaks the size rule, then keep the smallest cut. Here, greedy and the five grows give three, five, five, nine, three and three. So the best is three: A, B and C against D and E. Pause and guess: can a smaller cut ever be the worse choice?</a:t>
             </a:r>
           </a:p>
         </p:txBody>
@@ -1223,7 +1231,7 @@
           <a:lstStyle/>
           <a:p>
             <a:r>
-              <a:t>Methods like KL and FM need a legal first split. Random shuffles and deals: it is fast, but it depends on luck. Greedy keeps the heaviest edge inside, then puts each cell where it cuts less. Grow spreads from a start node, so the start node matters. Ties and size limits can change the answer. So build several starts, keep only the legal ones, and pick the smallest cut.</a:t>
+              <a:t>Three traps can fool a method that looks sensible. And yes, a smaller cut can be the worse choice. Here is a star: A in the middle, wired to five other cells. An older greedy had no size limit, so it kept adding cells next to A. It ended with five cells against one, and a cut of five.</a:t>
             </a:r>
           </a:p>
         </p:txBody>
@@ -1293,7 +1301,7 @@
           <a:lstStyle/>
           <a:p>
             <a:r>
-              <a:t>A chip is made of small building blocks called cells, joined by wires. We draw each cell as a dot, called a node. A line between two nodes is an edge: it means the two cells are wired together. The number on an edge is its weight: how many wires join the pair. Our example has five cells, A to E. The heaviest edges, A–B and D–E, have five wires each.</a:t>
+              <a:t>A chip is made of small building blocks called cells, joined by wires. Our example has five cells, named A to E. Some pairs share many wires, others only one.</a:t>
             </a:r>
           </a:p>
         </p:txBody>
@@ -1363,7 +1371,567 @@
           <a:lstStyle/>
           <a:p>
             <a:r>
-              <a:t>Now it's your turn. Pick a track: the browser lab, the Python track, or both. Tick each box of the checklist as you go. Then take the short quiz to check the main ideas. Next comes Kernighan–Lin, which starts from your split and makes it better.</a:t>
+              <a:t>With six cells, each side must hold exactly three, so that split is not legal. Our greedy stops each side at three cells, and gets fifteen. No legal split of this star does better.</a:t>
+            </a:r>
+          </a:p>
+        </p:txBody>
+      </p:sp>
+      <p:sp>
+        <p:nvSpPr>
+          <p:cNvPr id="4" name="Slide Number Placeholder 3"/>
+          <p:cNvSpPr>
+            <a:spLocks noGrp="1"/>
+          </p:cNvSpPr>
+          <p:nvPr>
+            <p:ph type="sldNum" idx="5" sz="quarter"/>
+          </p:nvPr>
+        </p:nvSpPr>
+        <p:spPr/>
+      </p:sp>
+    </p:spTree>
+  </p:cSld>
+  <p:clrMapOvr>
+    <a:masterClrMapping/>
+  </p:clrMapOvr>
+</p:notes>
+</file>
+
+<file path=ppt/notesSlides/notesSlide21.xml><?xml version="1.0" encoding="utf-8"?>
+<p:notes xmlns:a="http://schemas.openxmlformats.org/drawingml/2006/main" xmlns:p="http://schemas.openxmlformats.org/presentationml/2006/main" xmlns:r="http://schemas.openxmlformats.org/officeDocument/2006/relationships">
+  <p:cSld>
+    <p:spTree>
+      <p:nvGrpSpPr>
+        <p:cNvPr id="1" name=""/>
+        <p:cNvGrpSpPr/>
+        <p:nvPr/>
+      </p:nvGrpSpPr>
+      <p:grpSpPr>
+        <a:xfrm>
+          <a:off x="0" y="0"/>
+          <a:ext cx="0" cy="0"/>
+          <a:chOff x="0" y="0"/>
+          <a:chExt cx="0" cy="0"/>
+        </a:xfrm>
+      </p:grpSpPr>
+      <p:sp>
+        <p:nvSpPr>
+          <p:cNvPr id="2" name="Slide Image Placeholder 1"/>
+          <p:cNvSpPr>
+            <a:spLocks noGrp="1"/>
+          </p:cNvSpPr>
+          <p:nvPr>
+            <p:ph type="sldImg" idx="2"/>
+          </p:nvPr>
+        </p:nvSpPr>
+        <p:spPr/>
+      </p:sp>
+      <p:sp>
+        <p:nvSpPr>
+          <p:cNvPr id="3" name="Notes Placeholder 2"/>
+          <p:cNvSpPr>
+            <a:spLocks noGrp="1"/>
+          </p:cNvSpPr>
+          <p:nvPr>
+            <p:ph type="body" idx="3" sz="quarter"/>
+          </p:nvPr>
+        </p:nvSpPr>
+        <p:spPr/>
+        <p:txBody>
+          <a:bodyPr/>
+          <a:lstStyle/>
+          <a:p>
+            <a:r>
+              <a:t>In this graph, A–B and D–E both weigh five. Greedy must pick one of them to start from. The rule picks the smaller name, A–B, and that gives a cut of nine.</a:t>
+            </a:r>
+          </a:p>
+        </p:txBody>
+      </p:sp>
+      <p:sp>
+        <p:nvSpPr>
+          <p:cNvPr id="4" name="Slide Number Placeholder 3"/>
+          <p:cNvSpPr>
+            <a:spLocks noGrp="1"/>
+          </p:cNvSpPr>
+          <p:nvPr>
+            <p:ph type="sldNum" idx="5" sz="quarter"/>
+          </p:nvPr>
+        </p:nvSpPr>
+        <p:spPr/>
+      </p:sp>
+    </p:spTree>
+  </p:cSld>
+  <p:clrMapOvr>
+    <a:masterClrMapping/>
+  </p:clrMapOvr>
+</p:notes>
+</file>
+
+<file path=ppt/notesSlides/notesSlide22.xml><?xml version="1.0" encoding="utf-8"?>
+<p:notes xmlns:a="http://schemas.openxmlformats.org/drawingml/2006/main" xmlns:p="http://schemas.openxmlformats.org/presentationml/2006/main" xmlns:r="http://schemas.openxmlformats.org/officeDocument/2006/relationships">
+  <p:cSld>
+    <p:spTree>
+      <p:nvGrpSpPr>
+        <p:cNvPr id="1" name=""/>
+        <p:cNvGrpSpPr/>
+        <p:nvPr/>
+      </p:nvGrpSpPr>
+      <p:grpSpPr>
+        <a:xfrm>
+          <a:off x="0" y="0"/>
+          <a:ext cx="0" cy="0"/>
+          <a:chOff x="0" y="0"/>
+          <a:chExt cx="0" cy="0"/>
+        </a:xfrm>
+      </p:grpSpPr>
+      <p:sp>
+        <p:nvSpPr>
+          <p:cNvPr id="2" name="Slide Image Placeholder 1"/>
+          <p:cNvSpPr>
+            <a:spLocks noGrp="1"/>
+          </p:cNvSpPr>
+          <p:nvPr>
+            <p:ph type="sldImg" idx="2"/>
+          </p:nvPr>
+        </p:nvSpPr>
+        <p:spPr/>
+      </p:sp>
+      <p:sp>
+        <p:nvSpPr>
+          <p:cNvPr id="3" name="Notes Placeholder 2"/>
+          <p:cNvSpPr>
+            <a:spLocks noGrp="1"/>
+          </p:cNvSpPr>
+          <p:nvPr>
+            <p:ph type="body" idx="3" sz="quarter"/>
+          </p:nvPr>
+        </p:nvSpPr>
+        <p:spPr/>
+        <p:txBody>
+          <a:bodyPr/>
+          <a:lstStyle/>
+          <a:p>
+            <a:r>
+              <a:t>Starting from D–E instead gives a cut of four. So a tie rule more than doubled the cut. Grow from C also finds four.</a:t>
+            </a:r>
+          </a:p>
+        </p:txBody>
+      </p:sp>
+      <p:sp>
+        <p:nvSpPr>
+          <p:cNvPr id="4" name="Slide Number Placeholder 3"/>
+          <p:cNvSpPr>
+            <a:spLocks noGrp="1"/>
+          </p:cNvSpPr>
+          <p:nvPr>
+            <p:ph type="sldNum" idx="5" sz="quarter"/>
+          </p:nvPr>
+        </p:nvSpPr>
+        <p:spPr/>
+      </p:sp>
+    </p:spTree>
+  </p:cSld>
+  <p:clrMapOvr>
+    <a:masterClrMapping/>
+  </p:clrMapOvr>
+</p:notes>
+</file>
+
+<file path=ppt/notesSlides/notesSlide23.xml><?xml version="1.0" encoding="utf-8"?>
+<p:notes xmlns:a="http://schemas.openxmlformats.org/drawingml/2006/main" xmlns:p="http://schemas.openxmlformats.org/presentationml/2006/main" xmlns:r="http://schemas.openxmlformats.org/officeDocument/2006/relationships">
+  <p:cSld>
+    <p:spTree>
+      <p:nvGrpSpPr>
+        <p:cNvPr id="1" name=""/>
+        <p:cNvGrpSpPr/>
+        <p:nvPr/>
+      </p:nvGrpSpPr>
+      <p:grpSpPr>
+        <a:xfrm>
+          <a:off x="0" y="0"/>
+          <a:ext cx="0" cy="0"/>
+          <a:chOff x="0" y="0"/>
+          <a:chExt cx="0" cy="0"/>
+        </a:xfrm>
+      </p:grpSpPr>
+      <p:sp>
+        <p:nvSpPr>
+          <p:cNvPr id="2" name="Slide Image Placeholder 1"/>
+          <p:cNvSpPr>
+            <a:spLocks noGrp="1"/>
+          </p:cNvSpPr>
+          <p:nvPr>
+            <p:ph type="sldImg" idx="2"/>
+          </p:nvPr>
+        </p:nvSpPr>
+        <p:spPr/>
+      </p:sp>
+      <p:sp>
+        <p:nvSpPr>
+          <p:cNvPr id="3" name="Notes Placeholder 2"/>
+          <p:cNvSpPr>
+            <a:spLocks noGrp="1"/>
+          </p:cNvSpPr>
+          <p:nvPr>
+            <p:ph type="body" idx="3" sz="quarter"/>
+          </p:nvPr>
+        </p:nvSpPr>
+        <p:spPr/>
+        <p:txBody>
+          <a:bodyPr/>
+          <a:lstStyle/>
+          <a:p>
+            <a:r>
+              <a:t>Here are two triangles, joined by one bridge, C–D, with weight four. Every triangle edge weighs three. Greedy starts from the heaviest edge, which is the bridge itself. So C and D begin on the same side, and the cut ends at twelve.</a:t>
+            </a:r>
+          </a:p>
+        </p:txBody>
+      </p:sp>
+      <p:sp>
+        <p:nvSpPr>
+          <p:cNvPr id="4" name="Slide Number Placeholder 3"/>
+          <p:cNvSpPr>
+            <a:spLocks noGrp="1"/>
+          </p:cNvSpPr>
+          <p:nvPr>
+            <p:ph type="sldNum" idx="5" sz="quarter"/>
+          </p:nvPr>
+        </p:nvSpPr>
+        <p:spPr/>
+      </p:sp>
+    </p:spTree>
+  </p:cSld>
+  <p:clrMapOvr>
+    <a:masterClrMapping/>
+  </p:clrMapOvr>
+</p:notes>
+</file>
+
+<file path=ppt/notesSlides/notesSlide24.xml><?xml version="1.0" encoding="utf-8"?>
+<p:notes xmlns:a="http://schemas.openxmlformats.org/drawingml/2006/main" xmlns:p="http://schemas.openxmlformats.org/presentationml/2006/main" xmlns:r="http://schemas.openxmlformats.org/officeDocument/2006/relationships">
+  <p:cSld>
+    <p:spTree>
+      <p:nvGrpSpPr>
+        <p:cNvPr id="1" name=""/>
+        <p:cNvGrpSpPr/>
+        <p:nvPr/>
+      </p:nvGrpSpPr>
+      <p:grpSpPr>
+        <a:xfrm>
+          <a:off x="0" y="0"/>
+          <a:ext cx="0" cy="0"/>
+          <a:chOff x="0" y="0"/>
+          <a:chExt cx="0" cy="0"/>
+        </a:xfrm>
+      </p:grpSpPr>
+      <p:sp>
+        <p:nvSpPr>
+          <p:cNvPr id="2" name="Slide Image Placeholder 1"/>
+          <p:cNvSpPr>
+            <a:spLocks noGrp="1"/>
+          </p:cNvSpPr>
+          <p:nvPr>
+            <p:ph type="sldImg" idx="2"/>
+          </p:nvPr>
+        </p:nvSpPr>
+        <p:spPr/>
+      </p:sp>
+      <p:sp>
+        <p:nvSpPr>
+          <p:cNvPr id="3" name="Notes Placeholder 2"/>
+          <p:cNvSpPr>
+            <a:spLocks noGrp="1"/>
+          </p:cNvSpPr>
+          <p:nvPr>
+            <p:ph type="body" idx="3" sz="quarter"/>
+          </p:nvPr>
+        </p:nvSpPr>
+        <p:spPr/>
+        <p:txBody>
+          <a:bodyPr/>
+          <a:lstStyle/>
+          <a:p>
+            <a:r>
+              <a:t>Grow from A keeps its triangle together, and cuts only the bridge: four. Pause and guess: is grow always better than greedy?</a:t>
+            </a:r>
+          </a:p>
+        </p:txBody>
+      </p:sp>
+      <p:sp>
+        <p:nvSpPr>
+          <p:cNvPr id="4" name="Slide Number Placeholder 3"/>
+          <p:cNvSpPr>
+            <a:spLocks noGrp="1"/>
+          </p:cNvSpPr>
+          <p:nvPr>
+            <p:ph type="sldNum" idx="5" sz="quarter"/>
+          </p:nvPr>
+        </p:nvSpPr>
+        <p:spPr/>
+      </p:sp>
+    </p:spTree>
+  </p:cSld>
+  <p:clrMapOvr>
+    <a:masterClrMapping/>
+  </p:clrMapOvr>
+</p:notes>
+</file>
+
+<file path=ppt/notesSlides/notesSlide25.xml><?xml version="1.0" encoding="utf-8"?>
+<p:notes xmlns:a="http://schemas.openxmlformats.org/drawingml/2006/main" xmlns:p="http://schemas.openxmlformats.org/presentationml/2006/main" xmlns:r="http://schemas.openxmlformats.org/officeDocument/2006/relationships">
+  <p:cSld>
+    <p:spTree>
+      <p:nvGrpSpPr>
+        <p:cNvPr id="1" name=""/>
+        <p:cNvGrpSpPr/>
+        <p:nvPr/>
+      </p:nvGrpSpPr>
+      <p:grpSpPr>
+        <a:xfrm>
+          <a:off x="0" y="0"/>
+          <a:ext cx="0" cy="0"/>
+          <a:chOff x="0" y="0"/>
+          <a:chExt cx="0" cy="0"/>
+        </a:xfrm>
+      </p:grpSpPr>
+      <p:sp>
+        <p:nvSpPr>
+          <p:cNvPr id="2" name="Slide Image Placeholder 1"/>
+          <p:cNvSpPr>
+            <a:spLocks noGrp="1"/>
+          </p:cNvSpPr>
+          <p:nvPr>
+            <p:ph type="sldImg" idx="2"/>
+          </p:nvPr>
+        </p:nvSpPr>
+        <p:spPr/>
+      </p:sp>
+      <p:sp>
+        <p:nvSpPr>
+          <p:cNvPr id="3" name="Notes Placeholder 2"/>
+          <p:cNvSpPr>
+            <a:spLocks noGrp="1"/>
+          </p:cNvSpPr>
+          <p:nvPr>
+            <p:ph type="body" idx="3" sz="quarter"/>
+          </p:nvPr>
+        </p:nvSpPr>
+        <p:spPr/>
+        <p:txBody>
+          <a:bodyPr/>
+          <a:lstStyle/>
+          <a:p>
+            <a:r>
+              <a:t>Now you get to build the splits yourself. And no, grow is not always better: on our first graph, greedy found three, and grow from A only five. In the browser lab, you click cells to move them between sides, and watch both numbers change. You can also run random, greedy and grow. The challenges check the split you built, not the button you clicked.</a:t>
+            </a:r>
+          </a:p>
+        </p:txBody>
+      </p:sp>
+      <p:sp>
+        <p:nvSpPr>
+          <p:cNvPr id="4" name="Slide Number Placeholder 3"/>
+          <p:cNvSpPr>
+            <a:spLocks noGrp="1"/>
+          </p:cNvSpPr>
+          <p:nvPr>
+            <p:ph type="sldNum" idx="5" sz="quarter"/>
+          </p:nvPr>
+        </p:nvSpPr>
+        <p:spPr/>
+      </p:sp>
+    </p:spTree>
+  </p:cSld>
+  <p:clrMapOvr>
+    <a:masterClrMapping/>
+  </p:clrMapOvr>
+</p:notes>
+</file>
+
+<file path=ppt/notesSlides/notesSlide26.xml><?xml version="1.0" encoding="utf-8"?>
+<p:notes xmlns:a="http://schemas.openxmlformats.org/drawingml/2006/main" xmlns:p="http://schemas.openxmlformats.org/presentationml/2006/main" xmlns:r="http://schemas.openxmlformats.org/officeDocument/2006/relationships">
+  <p:cSld>
+    <p:spTree>
+      <p:nvGrpSpPr>
+        <p:cNvPr id="1" name=""/>
+        <p:cNvGrpSpPr/>
+        <p:nvPr/>
+      </p:nvGrpSpPr>
+      <p:grpSpPr>
+        <a:xfrm>
+          <a:off x="0" y="0"/>
+          <a:ext cx="0" cy="0"/>
+          <a:chOff x="0" y="0"/>
+          <a:chExt cx="0" cy="0"/>
+        </a:xfrm>
+      </p:grpSpPr>
+      <p:sp>
+        <p:nvSpPr>
+          <p:cNvPr id="2" name="Slide Image Placeholder 1"/>
+          <p:cNvSpPr>
+            <a:spLocks noGrp="1"/>
+          </p:cNvSpPr>
+          <p:nvPr>
+            <p:ph type="sldImg" idx="2"/>
+          </p:nvPr>
+        </p:nvSpPr>
+        <p:spPr/>
+      </p:sp>
+      <p:sp>
+        <p:nvSpPr>
+          <p:cNvPr id="3" name="Notes Placeholder 2"/>
+          <p:cNvSpPr>
+            <a:spLocks noGrp="1"/>
+          </p:cNvSpPr>
+          <p:nvPr>
+            <p:ph type="body" idx="3" sz="quarter"/>
+          </p:nvPr>
+        </p:nvSpPr>
+        <p:spPr/>
+        <p:txBody>
+          <a:bodyPr/>
+          <a:lstStyle/>
+          <a:p>
+            <a:r>
+              <a:t>If you like programming, write the three recipes in Python. The examples file gives the exact rules, ties included. Run the checker once to print every correct answer. Then run it on your own file. It also feeds the graph in reverse order, so a missing tie rule shows up as a failure.</a:t>
+            </a:r>
+          </a:p>
+        </p:txBody>
+      </p:sp>
+      <p:sp>
+        <p:nvSpPr>
+          <p:cNvPr id="4" name="Slide Number Placeholder 3"/>
+          <p:cNvSpPr>
+            <a:spLocks noGrp="1"/>
+          </p:cNvSpPr>
+          <p:nvPr>
+            <p:ph type="sldNum" idx="5" sz="quarter"/>
+          </p:nvPr>
+        </p:nvSpPr>
+        <p:spPr/>
+      </p:sp>
+    </p:spTree>
+  </p:cSld>
+  <p:clrMapOvr>
+    <a:masterClrMapping/>
+  </p:clrMapOvr>
+</p:notes>
+</file>
+
+<file path=ppt/notesSlides/notesSlide27.xml><?xml version="1.0" encoding="utf-8"?>
+<p:notes xmlns:a="http://schemas.openxmlformats.org/drawingml/2006/main" xmlns:p="http://schemas.openxmlformats.org/presentationml/2006/main" xmlns:r="http://schemas.openxmlformats.org/officeDocument/2006/relationships">
+  <p:cSld>
+    <p:spTree>
+      <p:nvGrpSpPr>
+        <p:cNvPr id="1" name=""/>
+        <p:cNvGrpSpPr/>
+        <p:nvPr/>
+      </p:nvGrpSpPr>
+      <p:grpSpPr>
+        <a:xfrm>
+          <a:off x="0" y="0"/>
+          <a:ext cx="0" cy="0"/>
+          <a:chOff x="0" y="0"/>
+          <a:chExt cx="0" cy="0"/>
+        </a:xfrm>
+      </p:grpSpPr>
+      <p:sp>
+        <p:nvSpPr>
+          <p:cNvPr id="2" name="Slide Image Placeholder 1"/>
+          <p:cNvSpPr>
+            <a:spLocks noGrp="1"/>
+          </p:cNvSpPr>
+          <p:nvPr>
+            <p:ph type="sldImg" idx="2"/>
+          </p:nvPr>
+        </p:nvSpPr>
+        <p:spPr/>
+      </p:sp>
+      <p:sp>
+        <p:nvSpPr>
+          <p:cNvPr id="3" name="Notes Placeholder 2"/>
+          <p:cNvSpPr>
+            <a:spLocks noGrp="1"/>
+          </p:cNvSpPr>
+          <p:nvPr>
+            <p:ph type="body" idx="3" sz="quarter"/>
+          </p:nvPr>
+        </p:nvSpPr>
+        <p:spPr/>
+        <p:txBody>
+          <a:bodyPr/>
+          <a:lstStyle/>
+          <a:p>
+            <a:r>
+              <a:t>Random is fast, but it depends on luck. Greedy keeps heavy edges inside, but ties and bridges can fool it. Grow depends on its start node. Report the balance with every cut, and never let a side pass its limit. Break ties by name, not by the order of the input file. So try several starts, keep the best legal one.</a:t>
+            </a:r>
+          </a:p>
+        </p:txBody>
+      </p:sp>
+      <p:sp>
+        <p:nvSpPr>
+          <p:cNvPr id="4" name="Slide Number Placeholder 3"/>
+          <p:cNvSpPr>
+            <a:spLocks noGrp="1"/>
+          </p:cNvSpPr>
+          <p:nvPr>
+            <p:ph type="sldNum" idx="5" sz="quarter"/>
+          </p:nvPr>
+        </p:nvSpPr>
+        <p:spPr/>
+      </p:sp>
+    </p:spTree>
+  </p:cSld>
+  <p:clrMapOvr>
+    <a:masterClrMapping/>
+  </p:clrMapOvr>
+</p:notes>
+</file>
+
+<file path=ppt/notesSlides/notesSlide28.xml><?xml version="1.0" encoding="utf-8"?>
+<p:notes xmlns:a="http://schemas.openxmlformats.org/drawingml/2006/main" xmlns:p="http://schemas.openxmlformats.org/presentationml/2006/main" xmlns:r="http://schemas.openxmlformats.org/officeDocument/2006/relationships">
+  <p:cSld>
+    <p:spTree>
+      <p:nvGrpSpPr>
+        <p:cNvPr id="1" name=""/>
+        <p:cNvGrpSpPr/>
+        <p:nvPr/>
+      </p:nvGrpSpPr>
+      <p:grpSpPr>
+        <a:xfrm>
+          <a:off x="0" y="0"/>
+          <a:ext cx="0" cy="0"/>
+          <a:chOff x="0" y="0"/>
+          <a:chExt cx="0" cy="0"/>
+        </a:xfrm>
+      </p:grpSpPr>
+      <p:sp>
+        <p:nvSpPr>
+          <p:cNvPr id="2" name="Slide Image Placeholder 1"/>
+          <p:cNvSpPr>
+            <a:spLocks noGrp="1"/>
+          </p:cNvSpPr>
+          <p:nvPr>
+            <p:ph type="sldImg" idx="2"/>
+          </p:nvPr>
+        </p:nvSpPr>
+        <p:spPr/>
+      </p:sp>
+      <p:sp>
+        <p:nvSpPr>
+          <p:cNvPr id="3" name="Notes Placeholder 2"/>
+          <p:cNvSpPr>
+            <a:spLocks noGrp="1"/>
+          </p:cNvSpPr>
+          <p:nvPr>
+            <p:ph type="body" idx="3" sz="quarter"/>
+          </p:nvPr>
+        </p:nvSpPr>
+        <p:spPr/>
+        <p:txBody>
+          <a:bodyPr/>
+          <a:lstStyle/>
+          <a:p>
+            <a:r>
+              <a:t>Pick a track: the browser lab, Python, or both. Tick each box of the checklist, then take the short quiz. Next comes Kernighan–Lin, which starts from your split and makes it better. Pause and guess: how much can it shrink the unlucky cut of sixteen? Lab four will show you.</a:t>
             </a:r>
           </a:p>
         </p:txBody>
@@ -1433,7 +2001,7 @@
           <a:lstStyle/>
           <a:p>
             <a:r>
-              <a:t>Splitting a chip into two sides is called a bipartition. Edges that cross between the two sides are cut, and they are drawn in red. The cutsize adds up their weights: here, two plus one makes three. Putting every cell on one side gives a cut of zero, but that split is useless. So we also check balance: how many cells each side holds. A split is legal when no side holds more than three of the five cells.</a:t>
+              <a:t>We draw each cell as a dot, called a node. A line between two nodes is an edge. Its number, the weight, counts the wires between the pair. A–B and D–E are the heaviest, with five wires each.</a:t>
             </a:r>
           </a:p>
         </p:txBody>
@@ -1503,7 +2071,7 @@
           <a:lstStyle/>
           <a:p>
             <a:r>
-              <a:t>Labs four and five teach two famous methods, called KL and FM. They improve a split by moving cells from one side to the other. But they can only improve: they need a legal split to start from. Think of picking two teams for a game. First you need any two teams, then you swap players to make the game fair. A good first split leaves less swapping to do.</a:t>
+              <a:t>Splitting the cells into two sides is called a bipartition. Edges that cross between the two sides are cut, and drawn in red. The cutsize adds up their weights: here, two plus one makes three.</a:t>
             </a:r>
           </a:p>
         </p:txBody>
@@ -1573,7 +2141,7 @@
           <a:lstStyle/>
           <a:p>
             <a:r>
-              <a:t>Here is our graph again, before any split. It has five cells, so the sides will hold two cells and three cells. Every method reports two numbers: the cutsize and the balance. Let's build a first split in three different ways.</a:t>
+              <a:t>Putting every cell on one side gives a cut of zero, but that split is useless. So we also check balance: how many cells each side holds. A split is legal when no side holds more than three of the five.</a:t>
             </a:r>
           </a:p>
         </p:txBody>
@@ -1643,7 +2211,7 @@
           <a:lstStyle/>
           <a:p>
             <a:r>
-              <a:t>Method one is random. Write the five names on cards, shuffle them, and deal two cards to one side. The other three cards go to the other side. A computer shuffles using a number called the seed. The same seed always gives the same shuffle. With seed five, D and E land together. Only C–D and C–E are cut, so the cutsize is three. That is the best split this graph has, found by pure luck.</a:t>
+              <a:t>Labs four and five teach two famous methods, called KL and FM. They improve a split by moving cells from one side to the other. But KL and FM need a legal split to start from. Think of picking two teams: first any two teams, then swaps to make the game fair. A good first split leaves less swapping to do. Pause and guess: could a split made at random be as good as this one, with cut three?</a:t>
             </a:r>
           </a:p>
         </p:txBody>
@@ -1713,7 +2281,7 @@
           <a:lstStyle/>
           <a:p>
             <a:r>
-              <a:t>Method two is greedy: at each step, it takes what looks best right now. It starts by putting both ends of the heaviest edge on one side. A–B and D–E both weigh five, so a fixed rule picks the smaller name: A–B. D starts the other side: it has no wire to A or B, and it comes before E. C joins A and B, with five wires there against two to D. Last, E joins D, which cuts only the edge of weight one to C. The cutsize is three.</a:t>
+              <a:t>Three short recipes can build a first split: random, greedy and grow. And yes, a random split can reach cut three, if it is lucky. Every recipe puts two cells on one side, and three on the other.</a:t>
             </a:r>
           </a:p>
         </p:txBody>
@@ -1783,7 +2351,7 @@
           <a:lstStyle/>
           <a:p>
             <a:r>
-              <a:t>Method three is grow. Pick a start node, and grow a side around it, like a drop of ink spreading on paper. At each step, add the node behind the heaviest edge that leaves the side. Start from D. The heaviest edge out of D goes to E, with weight five. Now the side holds two of the five cells, which is enough, so it stops. A, B and C form the other side, and the cutsize is three again.</a:t>
+              <a:t>Recipe one is random. Shuffle the five names like cards, and deal two of them to one side. A number called the seed fixes the shuffle, so the same seed always gives the same split. Seed five deals D and E together. Only C–D and C–E are cut: three.</a:t>
             </a:r>
           </a:p>
         </p:txBody>
@@ -1853,7 +2421,7 @@
           <a:lstStyle/>
           <a:p>
             <a:r>
-              <a:t>So far, all three methods found the same split. But that was partly luck. Other seeds and other start nodes give cuts from three up to sixteen. Each of those splits is legal, so none of them is wrong. That is why we build several starts, and keep the one with the smallest cut.</a:t>
+              <a:t>Recipe two is greedy: at each step, it takes what looks best right now. It keeps the heaviest edge, A–B, inside one side. D, which has no wire to A or B, starts the other side. Each other cell joins the side where it cuts less. The cut is three again.</a:t>
             </a:r>
           </a:p>
         </p:txBody>
@@ -4915,7 +5483,7 @@
                 </a:solidFill>
                 <a:latin typeface="Calibri"/>
               </a:rPr>
-              <a:t>Before a computer can improve how a chip is split, it needs a first split</a:t>
+              <a:t>Before a computer can improve how a chip is split, it needs a first split, called the initial bipartition</a:t>
             </a:r>
           </a:p>
         </p:txBody>
@@ -5011,169 +5579,14 @@
                 </a:solidFill>
                 <a:latin typeface="Calibri"/>
               </a:rPr>
-              <a:t>Worked example: an unlucky seed</a:t>
-            </a:r>
-          </a:p>
-        </p:txBody>
-      </p:sp>
-      <p:sp>
-        <p:nvSpPr>
-          <p:cNvPr id="3" name="TextBox 2"/>
-          <p:cNvSpPr txBox="1"/>
-          <p:nvPr/>
-        </p:nvSpPr>
-        <p:spPr>
-          <a:xfrm>
-            <a:off x="548640" y="1234440"/>
-            <a:ext cx="5303520" cy="4754880"/>
-          </a:xfrm>
-          <a:prstGeom prst="rect">
-            <a:avLst/>
-          </a:prstGeom>
-          <a:noFill/>
-        </p:spPr>
-        <p:txBody>
-          <a:bodyPr wrap="square">
-            <a:noAutofit/>
-          </a:bodyPr>
-          <a:lstStyle/>
-          <a:p>
-            <a:pPr lvl="0" marL="457200" indent="-228600">
-              <a:buFont typeface="Calibri"/>
-              <a:spcAft>
-                <a:spcPts val="1000"/>
-              </a:spcAft>
-              <a:buSzPct val="100000"/>
-              <a:buChar char="•"/>
-              <a:lnSpc>
-                <a:spcPts val="2200"/>
-              </a:lnSpc>
-            </a:pPr>
-            <a:r>
-              <a:rPr sz="2000" b="0">
-                <a:solidFill>
-                  <a:srgbClr val="333333"/>
-                </a:solidFill>
-                <a:latin typeface="Calibri"/>
-              </a:rPr>
-              <a:t>Now let's see how bad luck can get</a:t>
-            </a:r>
-          </a:p>
-          <a:p>
-            <a:pPr lvl="0" marL="457200" indent="-228600">
-              <a:buFont typeface="Calibri"/>
-              <a:spcAft>
-                <a:spcPts val="1000"/>
-              </a:spcAft>
-              <a:buSzPct val="100000"/>
-              <a:buChar char="•"/>
-              <a:lnSpc>
-                <a:spcPts val="2200"/>
-              </a:lnSpc>
-            </a:pPr>
-            <a:r>
-              <a:rPr sz="2000" b="0">
-                <a:solidFill>
-                  <a:srgbClr val="333333"/>
-                </a:solidFill>
-                <a:latin typeface="Calibri"/>
-              </a:rPr>
-              <a:t>With seed three, the shuffle deals B and D to one side</a:t>
-            </a:r>
-          </a:p>
-          <a:p>
-            <a:pPr lvl="0" marL="457200" indent="-228600">
-              <a:buFont typeface="Calibri"/>
-              <a:spcAft>
-                <a:spcPts val="1000"/>
-              </a:spcAft>
-              <a:buSzPct val="100000"/>
-              <a:buChar char="•"/>
-              <a:lnSpc>
-                <a:spcPts val="2200"/>
-              </a:lnSpc>
-            </a:pPr>
-            <a:r>
-              <a:rPr sz="2000" b="0">
-                <a:solidFill>
-                  <a:srgbClr val="333333"/>
-                </a:solidFill>
-                <a:latin typeface="Calibri"/>
-              </a:rPr>
-              <a:t>A, C and E end up on the other side</a:t>
-            </a:r>
-          </a:p>
-          <a:p>
-            <a:pPr lvl="0" marL="457200" indent="-228600">
-              <a:buFont typeface="Calibri"/>
-              <a:spcAft>
-                <a:spcPts val="1000"/>
-              </a:spcAft>
-              <a:buSzPct val="100000"/>
-              <a:buChar char="•"/>
-              <a:lnSpc>
-                <a:spcPts val="2200"/>
-              </a:lnSpc>
-            </a:pPr>
-            <a:r>
-              <a:rPr sz="2000" b="0">
-                <a:solidFill>
-                  <a:srgbClr val="333333"/>
-                </a:solidFill>
-                <a:latin typeface="Calibri"/>
-              </a:rPr>
-              <a:t>Let's add up the cut, edge by edge</a:t>
-            </a:r>
-          </a:p>
-          <a:p>
-            <a:pPr lvl="0" marL="457200" indent="-228600">
-              <a:buFont typeface="Calibri"/>
-              <a:spcAft>
-                <a:spcPts val="1000"/>
-              </a:spcAft>
-              <a:buSzPct val="100000"/>
-              <a:buChar char="•"/>
-              <a:lnSpc>
-                <a:spcPts val="2200"/>
-              </a:lnSpc>
-            </a:pPr>
-            <a:r>
-              <a:rPr sz="2000" b="0">
-                <a:solidFill>
-                  <a:srgbClr val="333333"/>
-                </a:solidFill>
-                <a:latin typeface="Calibri"/>
-              </a:rPr>
-              <a:t>A–B five, B–C four, C–D two and D–E five: sixteen in total</a:t>
-            </a:r>
-          </a:p>
-          <a:p>
-            <a:pPr lvl="0" marL="457200" indent="-228600">
-              <a:buFont typeface="Calibri"/>
-              <a:spcAft>
-                <a:spcPts val="1000"/>
-              </a:spcAft>
-              <a:buSzPct val="100000"/>
-              <a:buChar char="•"/>
-              <a:lnSpc>
-                <a:spcPts val="2200"/>
-              </a:lnSpc>
-            </a:pPr>
-            <a:r>
-              <a:rPr sz="2000" b="0">
-                <a:solidFill>
-                  <a:srgbClr val="333333"/>
-                </a:solidFill>
-                <a:latin typeface="Calibri"/>
-              </a:rPr>
-              <a:t>Both heavy edges are cut, so this is the worst legal split of all</a:t>
+              <a:t>Grow from D: ABC|DE cut 3</a:t>
             </a:r>
           </a:p>
         </p:txBody>
       </p:sp>
       <p:pic>
         <p:nvPicPr>
-          <p:cNvPr id="4" name="Picture 3" descr="worked-unlucky.png"/>
+          <p:cNvPr id="3" name="Picture 2" descr="04-grow-d.png"/>
           <p:cNvPicPr>
             <a:picLocks noChangeAspect="1"/>
           </p:cNvPicPr>
@@ -5187,14 +5600,53 @@
         </p:blipFill>
         <p:spPr>
           <a:xfrm>
-            <a:off x="6172200" y="1234440"/>
-            <a:ext cx="5277994" cy="4754879"/>
+            <a:off x="548640" y="1143000"/>
+            <a:ext cx="9183076" cy="4572000"/>
           </a:xfrm>
           <a:prstGeom prst="rect">
             <a:avLst/>
           </a:prstGeom>
         </p:spPr>
       </p:pic>
+      <p:sp>
+        <p:nvSpPr>
+          <p:cNvPr id="4" name="TextBox 3"/>
+          <p:cNvSpPr txBox="1"/>
+          <p:nvPr/>
+        </p:nvSpPr>
+        <p:spPr>
+          <a:xfrm>
+            <a:off x="548640" y="5897880"/>
+            <a:ext cx="11064240" cy="411480"/>
+          </a:xfrm>
+          <a:prstGeom prst="rect">
+            <a:avLst/>
+          </a:prstGeom>
+          <a:noFill/>
+        </p:spPr>
+        <p:txBody>
+          <a:bodyPr wrap="square">
+            <a:noAutofit/>
+          </a:bodyPr>
+          <a:lstStyle/>
+          <a:p>
+            <a:pPr>
+              <a:lnSpc>
+                <a:spcPts val="2200"/>
+              </a:lnSpc>
+            </a:pPr>
+            <a:r>
+              <a:rPr sz="1200" b="0">
+                <a:solidFill>
+                  <a:srgbClr val="333333"/>
+                </a:solidFill>
+                <a:latin typeface="Calibri"/>
+              </a:rPr>
+              <a:t>Grow from D: ABC|DE cut 3</a:t>
+            </a:r>
+          </a:p>
+        </p:txBody>
+      </p:sp>
       <p:sp>
         <p:nvSpPr>
           <p:cNvPr id="5" name="TextBox 4"/>
@@ -5286,169 +5738,14 @@
                 </a:solidFill>
                 <a:latin typeface="Calibri"/>
               </a:rPr>
-              <a:t>Grow depends on the start node</a:t>
-            </a:r>
-          </a:p>
-        </p:txBody>
-      </p:sp>
-      <p:sp>
-        <p:nvSpPr>
-          <p:cNvPr id="3" name="TextBox 2"/>
-          <p:cNvSpPr txBox="1"/>
-          <p:nvPr/>
-        </p:nvSpPr>
-        <p:spPr>
-          <a:xfrm>
-            <a:off x="548640" y="1234440"/>
-            <a:ext cx="5303520" cy="4754880"/>
-          </a:xfrm>
-          <a:prstGeom prst="rect">
-            <a:avLst/>
-          </a:prstGeom>
-          <a:noFill/>
-        </p:spPr>
-        <p:txBody>
-          <a:bodyPr wrap="square">
-            <a:noAutofit/>
-          </a:bodyPr>
-          <a:lstStyle/>
-          <a:p>
-            <a:pPr lvl="0" marL="457200" indent="-228600">
-              <a:buFont typeface="Calibri"/>
-              <a:spcAft>
-                <a:spcPts val="1000"/>
-              </a:spcAft>
-              <a:buSzPct val="100000"/>
-              <a:buChar char="•"/>
-              <a:lnSpc>
-                <a:spcPts val="2200"/>
-              </a:lnSpc>
-            </a:pPr>
-            <a:r>
-              <a:rPr sz="2000" b="0">
-                <a:solidFill>
-                  <a:srgbClr val="333333"/>
-                </a:solidFill>
-                <a:latin typeface="Calibri"/>
-              </a:rPr>
-              <a:t>Grow has no luck in it, but it has a choice: the start node</a:t>
-            </a:r>
-          </a:p>
-          <a:p>
-            <a:pPr lvl="0" marL="457200" indent="-228600">
-              <a:buFont typeface="Calibri"/>
-              <a:spcAft>
-                <a:spcPts val="1000"/>
-              </a:spcAft>
-              <a:buSzPct val="100000"/>
-              <a:buChar char="•"/>
-              <a:lnSpc>
-                <a:spcPts val="2200"/>
-              </a:lnSpc>
-            </a:pPr>
-            <a:r>
-              <a:rPr sz="2000" b="0">
-                <a:solidFill>
-                  <a:srgbClr val="333333"/>
-                </a:solidFill>
-                <a:latin typeface="Calibri"/>
-              </a:rPr>
-              <a:t>Start from A instead of D</a:t>
-            </a:r>
-          </a:p>
-          <a:p>
-            <a:pPr lvl="0" marL="457200" indent="-228600">
-              <a:buFont typeface="Calibri"/>
-              <a:spcAft>
-                <a:spcPts val="1000"/>
-              </a:spcAft>
-              <a:buSzPct val="100000"/>
-              <a:buChar char="•"/>
-              <a:lnSpc>
-                <a:spcPts val="2200"/>
-              </a:lnSpc>
-            </a:pPr>
-            <a:r>
-              <a:rPr sz="2000" b="0">
-                <a:solidFill>
-                  <a:srgbClr val="333333"/>
-                </a:solidFill>
-                <a:latin typeface="Calibri"/>
-              </a:rPr>
-              <a:t>The heaviest edge out of A goes to B, with weight five, so B joins A</a:t>
-            </a:r>
-          </a:p>
-          <a:p>
-            <a:pPr lvl="0" marL="457200" indent="-228600">
-              <a:buFont typeface="Calibri"/>
-              <a:spcAft>
-                <a:spcPts val="1000"/>
-              </a:spcAft>
-              <a:buSzPct val="100000"/>
-              <a:buChar char="•"/>
-              <a:lnSpc>
-                <a:spcPts val="2200"/>
-              </a:lnSpc>
-            </a:pPr>
-            <a:r>
-              <a:rPr sz="2000" b="0">
-                <a:solidFill>
-                  <a:srgbClr val="333333"/>
-                </a:solidFill>
-                <a:latin typeface="Calibri"/>
-              </a:rPr>
-              <a:t>With two cells, the side is full, and it stops</a:t>
-            </a:r>
-          </a:p>
-          <a:p>
-            <a:pPr lvl="0" marL="457200" indent="-228600">
-              <a:buFont typeface="Calibri"/>
-              <a:spcAft>
-                <a:spcPts val="1000"/>
-              </a:spcAft>
-              <a:buSzPct val="100000"/>
-              <a:buChar char="•"/>
-              <a:lnSpc>
-                <a:spcPts val="2200"/>
-              </a:lnSpc>
-            </a:pPr>
-            <a:r>
-              <a:rPr sz="2000" b="0">
-                <a:solidFill>
-                  <a:srgbClr val="333333"/>
-                </a:solidFill>
-                <a:latin typeface="Calibri"/>
-              </a:rPr>
-              <a:t>Now C, D and E form the other side, so A–C and B–C are cut</a:t>
-            </a:r>
-          </a:p>
-          <a:p>
-            <a:pPr lvl="0" marL="457200" indent="-228600">
-              <a:buFont typeface="Calibri"/>
-              <a:spcAft>
-                <a:spcPts val="1000"/>
-              </a:spcAft>
-              <a:buSzPct val="100000"/>
-              <a:buChar char="•"/>
-              <a:lnSpc>
-                <a:spcPts val="2200"/>
-              </a:lnSpc>
-            </a:pPr>
-            <a:r>
-              <a:rPr sz="2000" b="0">
-                <a:solidFill>
-                  <a:srgbClr val="333333"/>
-                </a:solidFill>
-                <a:latin typeface="Calibri"/>
-              </a:rPr>
-              <a:t>One plus four makes five, which is worse than three</a:t>
+              <a:t>All three found cut 3. Was that luck?</a:t>
             </a:r>
           </a:p>
         </p:txBody>
       </p:sp>
       <p:pic>
         <p:nvPicPr>
-          <p:cNvPr id="4" name="Picture 3" descr="grow-a.png"/>
+          <p:cNvPr id="3" name="Picture 2" descr="05-takeaway.png"/>
           <p:cNvPicPr>
             <a:picLocks noChangeAspect="1"/>
           </p:cNvPicPr>
@@ -5462,14 +5759,53 @@
         </p:blipFill>
         <p:spPr>
           <a:xfrm>
-            <a:off x="6172200" y="1234440"/>
-            <a:ext cx="4991147" cy="4754880"/>
+            <a:off x="548640" y="1143000"/>
+            <a:ext cx="9183076" cy="4572000"/>
           </a:xfrm>
           <a:prstGeom prst="rect">
             <a:avLst/>
           </a:prstGeom>
         </p:spPr>
       </p:pic>
+      <p:sp>
+        <p:nvSpPr>
+          <p:cNvPr id="4" name="TextBox 3"/>
+          <p:cNvSpPr txBox="1"/>
+          <p:nvPr/>
+        </p:nvSpPr>
+        <p:spPr>
+          <a:xfrm>
+            <a:off x="548640" y="5897880"/>
+            <a:ext cx="11064240" cy="411480"/>
+          </a:xfrm>
+          <a:prstGeom prst="rect">
+            <a:avLst/>
+          </a:prstGeom>
+          <a:noFill/>
+        </p:spPr>
+        <p:txBody>
+          <a:bodyPr wrap="square">
+            <a:noAutofit/>
+          </a:bodyPr>
+          <a:lstStyle/>
+          <a:p>
+            <a:pPr>
+              <a:lnSpc>
+                <a:spcPts val="2200"/>
+              </a:lnSpc>
+            </a:pPr>
+            <a:r>
+              <a:rPr sz="1200" b="0">
+                <a:solidFill>
+                  <a:srgbClr val="333333"/>
+                </a:solidFill>
+                <a:latin typeface="Calibri"/>
+              </a:rPr>
+              <a:t>All three found cut 3. Was that luck?</a:t>
+            </a:r>
+          </a:p>
+        </p:txBody>
+      </p:sp>
       <p:sp>
         <p:nvSpPr>
           <p:cNvPr id="5" name="TextBox 4"/>
@@ -5561,7 +5897,7 @@
                 </a:solidFill>
                 <a:latin typeface="Calibri"/>
               </a:rPr>
-              <a:t>Keep the best legal start</a:t>
+              <a:t>Worked example: an unlucky seed</a:t>
             </a:r>
           </a:p>
         </p:txBody>
@@ -5575,7 +5911,7 @@
         <p:spPr>
           <a:xfrm>
             <a:off x="548640" y="1234440"/>
-            <a:ext cx="11064240" cy="4937760"/>
+            <a:ext cx="5303520" cy="4754880"/>
           </a:xfrm>
           <a:prstGeom prst="rect">
             <a:avLst/>
@@ -5606,7 +5942,7 @@
                 </a:solidFill>
                 <a:latin typeface="Calibri"/>
               </a:rPr>
-              <a:t>The fix is simple: never trust a single start</a:t>
+              <a:t>A single unlucky shuffle can make the cut more than five times worse</a:t>
             </a:r>
           </a:p>
           <a:p>
@@ -5628,7 +5964,7 @@
                 </a:solidFill>
                 <a:latin typeface="Calibri"/>
               </a:rPr>
-              <a:t>Build several: a few random seeds, greedy, and grow from every node</a:t>
+              <a:t>So yes, it was partly luck</a:t>
             </a:r>
           </a:p>
           <a:p>
@@ -5650,80 +5986,38 @@
                 </a:solidFill>
                 <a:latin typeface="Calibri"/>
               </a:rPr>
-              <a:t>Throw away any split that breaks the size rule</a:t>
-            </a:r>
-          </a:p>
-          <a:p>
-            <a:pPr lvl="0" marL="457200" indent="-228600">
-              <a:buFont typeface="Calibri"/>
-              <a:spcAft>
-                <a:spcPts val="1000"/>
-              </a:spcAft>
-              <a:buSzPct val="100000"/>
-              <a:buChar char="•"/>
-              <a:lnSpc>
-                <a:spcPts val="2200"/>
-              </a:lnSpc>
-            </a:pPr>
-            <a:r>
-              <a:rPr sz="2000" b="0">
-                <a:solidFill>
-                  <a:srgbClr val="333333"/>
-                </a:solidFill>
-                <a:latin typeface="Calibri"/>
-              </a:rPr>
-              <a:t>Keep the one with the smallest cut</a:t>
-            </a:r>
-          </a:p>
-          <a:p>
-            <a:pPr lvl="0" marL="457200" indent="-228600">
-              <a:buFont typeface="Calibri"/>
-              <a:spcAft>
-                <a:spcPts val="1000"/>
-              </a:spcAft>
-              <a:buSzPct val="100000"/>
-              <a:buChar char="•"/>
-              <a:lnSpc>
-                <a:spcPts val="2200"/>
-              </a:lnSpc>
-            </a:pPr>
-            <a:r>
-              <a:rPr sz="2000" b="0">
-                <a:solidFill>
-                  <a:srgbClr val="333333"/>
-                </a:solidFill>
-                <a:latin typeface="Calibri"/>
-              </a:rPr>
-              <a:t>On our graph, greedy and the five grows give three, five, five, nine, three and three</a:t>
-            </a:r>
-          </a:p>
-          <a:p>
-            <a:pPr lvl="0" marL="457200" indent="-228600">
-              <a:buFont typeface="Calibri"/>
-              <a:spcAft>
-                <a:spcPts val="1000"/>
-              </a:spcAft>
-              <a:buSzPct val="100000"/>
-              <a:buChar char="•"/>
-              <a:lnSpc>
-                <a:spcPts val="2200"/>
-              </a:lnSpc>
-            </a:pPr>
-            <a:r>
-              <a:rPr sz="2000" b="0">
-                <a:solidFill>
-                  <a:srgbClr val="333333"/>
-                </a:solidFill>
-                <a:latin typeface="Calibri"/>
-              </a:rPr>
-              <a:t>The best is three: A, B and C against D and E</a:t>
-            </a:r>
-          </a:p>
-        </p:txBody>
-      </p:sp>
-      <p:sp>
-        <p:nvSpPr>
-          <p:cNvPr id="4" name="TextBox 3"/>
+              <a:t>With seed three, B and D land on one side, and A, C and E on the other</a:t>
+            </a:r>
+          </a:p>
+        </p:txBody>
+      </p:sp>
+      <p:pic>
+        <p:nvPicPr>
+          <p:cNvPr id="4" name="Picture 3" descr="worked-unlucky-1.png"/>
+          <p:cNvPicPr>
+            <a:picLocks noChangeAspect="1"/>
+          </p:cNvPicPr>
+          <p:nvPr/>
+        </p:nvPicPr>
+        <p:blipFill>
+          <a:blip r:embed="rId2"/>
+          <a:stretch>
+            <a:fillRect/>
+          </a:stretch>
+        </p:blipFill>
+        <p:spPr>
+          <a:xfrm>
+            <a:off x="6172200" y="1234440"/>
+            <a:ext cx="5277994" cy="4754879"/>
+          </a:xfrm>
+          <a:prstGeom prst="rect">
+            <a:avLst/>
+          </a:prstGeom>
+        </p:spPr>
+      </p:pic>
+      <p:sp>
+        <p:nvSpPr>
+          <p:cNvPr id="5" name="TextBox 4"/>
           <p:cNvSpPr txBox="1"/>
           <p:nvPr/>
         </p:nvSpPr>
@@ -5812,7 +6106,7 @@
                 </a:solidFill>
                 <a:latin typeface="Calibri"/>
               </a:rPr>
-              <a:t>Keep the best legal start — try these</a:t>
+              <a:t>Adding up the cut</a:t>
             </a:r>
           </a:p>
         </p:txBody>
@@ -5825,15 +6119,13 @@
         </p:nvSpPr>
         <p:spPr>
           <a:xfrm>
-            <a:off x="548640" y="1143000"/>
-            <a:ext cx="11064240" cy="5029200"/>
-          </a:xfrm>
-          <a:prstGeom prst="rect">
-            <a:avLst/>
-          </a:prstGeom>
-          <a:solidFill>
-            <a:srgbClr val="F4F4F4"/>
-          </a:solidFill>
+            <a:off x="548640" y="1234440"/>
+            <a:ext cx="5303520" cy="4754880"/>
+          </a:xfrm>
+          <a:prstGeom prst="rect">
+            <a:avLst/>
+          </a:prstGeom>
+          <a:noFill/>
         </p:spPr>
         <p:txBody>
           <a:bodyPr wrap="square">
@@ -5841,124 +6133,100 @@
           </a:bodyPr>
           <a:lstStyle/>
           <a:p>
-            <a:pPr>
-              <a:lnSpc>
-                <a:spcPts val="2200"/>
-              </a:lnSpc>
+            <a:pPr lvl="0" marL="457200" indent="-228600">
+              <a:buFont typeface="Calibri"/>
               <a:spcAft>
-                <a:spcPts val="400"/>
+                <a:spcPts val="1000"/>
               </a:spcAft>
+              <a:buSzPct val="100000"/>
+              <a:buChar char="•"/>
+              <a:lnSpc>
+                <a:spcPts val="2200"/>
+              </a:lnSpc>
             </a:pPr>
             <a:r>
               <a:rPr sz="2000" b="0">
                 <a:solidFill>
                   <a:srgbClr val="333333"/>
                 </a:solidFill>
-                <a:latin typeface="Consolas"/>
+                <a:latin typeface="Calibri"/>
               </a:rPr>
-              <a:t>best_start(graph):</a:t>
-            </a:r>
-          </a:p>
-          <a:p>
-            <a:pPr>
-              <a:lnSpc>
-                <a:spcPts val="2200"/>
-              </a:lnSpc>
+              <a:t>Let's add up the cut, edge by edge</a:t>
+            </a:r>
+          </a:p>
+          <a:p>
+            <a:pPr lvl="0" marL="457200" indent="-228600">
+              <a:buFont typeface="Calibri"/>
               <a:spcAft>
-                <a:spcPts val="400"/>
+                <a:spcPts val="1000"/>
               </a:spcAft>
+              <a:buSzPct val="100000"/>
+              <a:buChar char="•"/>
+              <a:lnSpc>
+                <a:spcPts val="2200"/>
+              </a:lnSpc>
             </a:pPr>
             <a:r>
               <a:rPr sz="2000" b="0">
                 <a:solidFill>
                   <a:srgbClr val="333333"/>
                 </a:solidFill>
-                <a:latin typeface="Consolas"/>
+                <a:latin typeface="Calibri"/>
               </a:rPr>
-              <a:t>  starts = random(seed) for a few seeds</a:t>
-            </a:r>
-          </a:p>
-          <a:p>
-            <a:pPr>
-              <a:lnSpc>
-                <a:spcPts val="2200"/>
-              </a:lnSpc>
+              <a:t>A–B five, B–C four, C–D two, and D–E five</a:t>
+            </a:r>
+          </a:p>
+          <a:p>
+            <a:pPr lvl="0" marL="457200" indent="-228600">
+              <a:buFont typeface="Calibri"/>
               <a:spcAft>
-                <a:spcPts val="400"/>
+                <a:spcPts val="1000"/>
               </a:spcAft>
+              <a:buSzPct val="100000"/>
+              <a:buChar char="•"/>
+              <a:lnSpc>
+                <a:spcPts val="2200"/>
+              </a:lnSpc>
             </a:pPr>
             <a:r>
               <a:rPr sz="2000" b="0">
                 <a:solidFill>
                   <a:srgbClr val="333333"/>
                 </a:solidFill>
-                <a:latin typeface="Consolas"/>
+                <a:latin typeface="Calibri"/>
               </a:rPr>
-              <a:t>         + greedy</a:t>
-            </a:r>
-          </a:p>
-          <a:p>
-            <a:pPr>
-              <a:lnSpc>
-                <a:spcPts val="2200"/>
-              </a:lnSpc>
-              <a:spcAft>
-                <a:spcPts val="400"/>
-              </a:spcAft>
-            </a:pPr>
-            <a:r>
-              <a:rPr sz="2000" b="0">
-                <a:solidFill>
-                  <a:srgbClr val="333333"/>
-                </a:solidFill>
-                <a:latin typeface="Consolas"/>
-              </a:rPr>
-              <a:t>         + grow(x) for every node x</a:t>
-            </a:r>
-          </a:p>
-          <a:p>
-            <a:pPr>
-              <a:lnSpc>
-                <a:spcPts val="2200"/>
-              </a:lnSpc>
-              <a:spcAft>
-                <a:spcPts val="400"/>
-              </a:spcAft>
-            </a:pPr>
-            <a:r>
-              <a:rPr sz="2000" b="0">
-                <a:solidFill>
-                  <a:srgbClr val="333333"/>
-                </a:solidFill>
-                <a:latin typeface="Consolas"/>
-              </a:rPr>
-              <a:t>  drop every start that is not legal</a:t>
-            </a:r>
-          </a:p>
-          <a:p>
-            <a:pPr>
-              <a:lnSpc>
-                <a:spcPts val="2200"/>
-              </a:lnSpc>
-              <a:spcAft>
-                <a:spcPts val="400"/>
-              </a:spcAft>
-            </a:pPr>
-            <a:r>
-              <a:rPr sz="2000" b="0">
-                <a:solidFill>
-                  <a:srgbClr val="333333"/>
-                </a:solidFill>
-                <a:latin typeface="Consolas"/>
-              </a:rPr>
-              <a:t>  return the start with the smallest cutsize</a:t>
-            </a:r>
-          </a:p>
-        </p:txBody>
-      </p:sp>
-      <p:sp>
-        <p:nvSpPr>
-          <p:cNvPr id="4" name="TextBox 3"/>
+              <a:t>That makes sixteen</a:t>
+            </a:r>
+          </a:p>
+        </p:txBody>
+      </p:sp>
+      <p:pic>
+        <p:nvPicPr>
+          <p:cNvPr id="4" name="Picture 3" descr="worked-unlucky-2.png"/>
+          <p:cNvPicPr>
+            <a:picLocks noChangeAspect="1"/>
+          </p:cNvPicPr>
+          <p:nvPr/>
+        </p:nvPicPr>
+        <p:blipFill>
+          <a:blip r:embed="rId2"/>
+          <a:stretch>
+            <a:fillRect/>
+          </a:stretch>
+        </p:blipFill>
+        <p:spPr>
+          <a:xfrm>
+            <a:off x="6172200" y="1234440"/>
+            <a:ext cx="5277994" cy="4754879"/>
+          </a:xfrm>
+          <a:prstGeom prst="rect">
+            <a:avLst/>
+          </a:prstGeom>
+        </p:spPr>
+      </p:pic>
+      <p:sp>
+        <p:nvSpPr>
+          <p:cNvPr id="5" name="TextBox 4"/>
           <p:cNvSpPr txBox="1"/>
           <p:nvPr/>
         </p:nvSpPr>
@@ -6047,7 +6315,7 @@
                 </a:solidFill>
                 <a:latin typeface="Calibri"/>
               </a:rPr>
-              <a:t>A size limit keeps the split legal</a:t>
+              <a:t>The worst legal split</a:t>
             </a:r>
           </a:p>
         </p:txBody>
@@ -6092,7 +6360,7 @@
                 </a:solidFill>
                 <a:latin typeface="Calibri"/>
               </a:rPr>
-              <a:t>Here is a star: A sits in the middle, wired to every other cell</a:t>
+              <a:t>Both heavy edges are cut, so this is the worst legal split of all</a:t>
             </a:r>
           </a:p>
           <a:p>
@@ -6114,7 +6382,7 @@
                 </a:solidFill>
                 <a:latin typeface="Calibri"/>
               </a:rPr>
-              <a:t>A–B weighs nine, and the four other edges weigh five</a:t>
+              <a:t>Over sixteen seeds, the cut goes from three to sixteen</a:t>
             </a:r>
           </a:p>
           <a:p>
@@ -6136,80 +6404,14 @@
                 </a:solidFill>
                 <a:latin typeface="Calibri"/>
               </a:rPr>
-              <a:t>With six cells, each side must hold exactly three</a:t>
-            </a:r>
-          </a:p>
-          <a:p>
-            <a:pPr lvl="0" marL="457200" indent="-228600">
-              <a:buFont typeface="Calibri"/>
-              <a:spcAft>
-                <a:spcPts val="1000"/>
-              </a:spcAft>
-              <a:buSzPct val="100000"/>
-              <a:buChar char="•"/>
-              <a:lnSpc>
-                <a:spcPts val="2200"/>
-              </a:lnSpc>
-            </a:pPr>
-            <a:r>
-              <a:rPr sz="2000" b="0">
-                <a:solidFill>
-                  <a:srgbClr val="333333"/>
-                </a:solidFill>
-                <a:latin typeface="Calibri"/>
-              </a:rPr>
-              <a:t>An older greedy had no size limit, so it kept adding cells next to A</a:t>
-            </a:r>
-          </a:p>
-          <a:p>
-            <a:pPr lvl="0" marL="457200" indent="-228600">
-              <a:buFont typeface="Calibri"/>
-              <a:spcAft>
-                <a:spcPts val="1000"/>
-              </a:spcAft>
-              <a:buSzPct val="100000"/>
-              <a:buChar char="•"/>
-              <a:lnSpc>
-                <a:spcPts val="2200"/>
-              </a:lnSpc>
-            </a:pPr>
-            <a:r>
-              <a:rPr sz="2000" b="0">
-                <a:solidFill>
-                  <a:srgbClr val="333333"/>
-                </a:solidFill>
-                <a:latin typeface="Calibri"/>
-              </a:rPr>
-              <a:t>It ended with five cells against one: cutsize five, but not legal</a:t>
-            </a:r>
-          </a:p>
-          <a:p>
-            <a:pPr lvl="0" marL="457200" indent="-228600">
-              <a:buFont typeface="Calibri"/>
-              <a:spcAft>
-                <a:spcPts val="1000"/>
-              </a:spcAft>
-              <a:buSzPct val="100000"/>
-              <a:buChar char="•"/>
-              <a:lnSpc>
-                <a:spcPts val="2200"/>
-              </a:lnSpc>
-            </a:pPr>
-            <a:r>
-              <a:rPr sz="2000" b="0">
-                <a:solidFill>
-                  <a:srgbClr val="333333"/>
-                </a:solidFill>
-                <a:latin typeface="Calibri"/>
-              </a:rPr>
-              <a:t>Our greedy stops each side at three cells, and gets fifteen</a:t>
+              <a:t>Only three of those seeds hit the best cut, three</a:t>
             </a:r>
           </a:p>
         </p:txBody>
       </p:sp>
       <p:pic>
         <p:nvPicPr>
-          <p:cNvPr id="4" name="Picture 3" descr="star-cap.png"/>
+          <p:cNvPr id="4" name="Picture 3" descr="worked-unlucky.png"/>
           <p:cNvPicPr>
             <a:picLocks noChangeAspect="1"/>
           </p:cNvPicPr>
@@ -6224,7 +6426,7 @@
         <p:spPr>
           <a:xfrm>
             <a:off x="6172200" y="1234440"/>
-            <a:ext cx="3733215" cy="4754879"/>
+            <a:ext cx="5277994" cy="4754879"/>
           </a:xfrm>
           <a:prstGeom prst="rect">
             <a:avLst/>
@@ -6322,7 +6524,7 @@
                 </a:solidFill>
                 <a:latin typeface="Calibri"/>
               </a:rPr>
-              <a:t>A tie can decide the answer</a:t>
+              <a:t>Grow depends on the start node</a:t>
             </a:r>
           </a:p>
         </p:txBody>
@@ -6367,7 +6569,7 @@
                 </a:solidFill>
                 <a:latin typeface="Calibri"/>
               </a:rPr>
-              <a:t>In this graph, A–B and D–E both weigh five again</a:t>
+              <a:t>Grow has no luck in it, but it has a choice: the start node</a:t>
             </a:r>
           </a:p>
           <a:p>
@@ -6389,102 +6591,14 @@
                 </a:solidFill>
                 <a:latin typeface="Calibri"/>
               </a:rPr>
-              <a:t>Greedy must pick one of them to start from</a:t>
-            </a:r>
-          </a:p>
-          <a:p>
-            <a:pPr lvl="0" marL="457200" indent="-228600">
-              <a:buFont typeface="Calibri"/>
-              <a:spcAft>
-                <a:spcPts val="1000"/>
-              </a:spcAft>
-              <a:buSzPct val="100000"/>
-              <a:buChar char="•"/>
-              <a:lnSpc>
-                <a:spcPts val="2200"/>
-              </a:lnSpc>
-            </a:pPr>
-            <a:r>
-              <a:rPr sz="2000" b="0">
-                <a:solidFill>
-                  <a:srgbClr val="333333"/>
-                </a:solidFill>
-                <a:latin typeface="Calibri"/>
-              </a:rPr>
-              <a:t>The rule picks the smaller name, A–B, and that gives a cutsize of nine</a:t>
-            </a:r>
-          </a:p>
-          <a:p>
-            <a:pPr lvl="0" marL="457200" indent="-228600">
-              <a:buFont typeface="Calibri"/>
-              <a:spcAft>
-                <a:spcPts val="1000"/>
-              </a:spcAft>
-              <a:buSzPct val="100000"/>
-              <a:buChar char="•"/>
-              <a:lnSpc>
-                <a:spcPts val="2200"/>
-              </a:lnSpc>
-            </a:pPr>
-            <a:r>
-              <a:rPr sz="2000" b="0">
-                <a:solidFill>
-                  <a:srgbClr val="333333"/>
-                </a:solidFill>
-                <a:latin typeface="Calibri"/>
-              </a:rPr>
-              <a:t>Starting from D–E instead gives a cutsize of four</a:t>
-            </a:r>
-          </a:p>
-          <a:p>
-            <a:pPr lvl="0" marL="457200" indent="-228600">
-              <a:buFont typeface="Calibri"/>
-              <a:spcAft>
-                <a:spcPts val="1000"/>
-              </a:spcAft>
-              <a:buSzPct val="100000"/>
-              <a:buChar char="•"/>
-              <a:lnSpc>
-                <a:spcPts val="2200"/>
-              </a:lnSpc>
-            </a:pPr>
-            <a:r>
-              <a:rPr sz="2000" b="0">
-                <a:solidFill>
-                  <a:srgbClr val="333333"/>
-                </a:solidFill>
-                <a:latin typeface="Calibri"/>
-              </a:rPr>
-              <a:t>So a simple tie rule more than doubled the cut</a:t>
-            </a:r>
-          </a:p>
-          <a:p>
-            <a:pPr lvl="0" marL="457200" indent="-228600">
-              <a:buFont typeface="Calibri"/>
-              <a:spcAft>
-                <a:spcPts val="1000"/>
-              </a:spcAft>
-              <a:buSzPct val="100000"/>
-              <a:buChar char="•"/>
-              <a:lnSpc>
-                <a:spcPts val="2200"/>
-              </a:lnSpc>
-            </a:pPr>
-            <a:r>
-              <a:rPr sz="2000" b="0">
-                <a:solidFill>
-                  <a:srgbClr val="333333"/>
-                </a:solidFill>
-                <a:latin typeface="Calibri"/>
-              </a:rPr>
-              <a:t>Grow from C also finds four, which is one more reason to try several starts</a:t>
+              <a:t>Let's start from A instead of D</a:t>
             </a:r>
           </a:p>
         </p:txBody>
       </p:sp>
       <p:pic>
         <p:nvPicPr>
-          <p:cNvPr id="4" name="Picture 3" descr="tie-graph.png"/>
+          <p:cNvPr id="4" name="Picture 3" descr="grow-a-1.png"/>
           <p:cNvPicPr>
             <a:picLocks noChangeAspect="1"/>
           </p:cNvPicPr>
@@ -6499,7 +6613,7 @@
         <p:spPr>
           <a:xfrm>
             <a:off x="6172200" y="1234440"/>
-            <a:ext cx="4007853" cy="4754879"/>
+            <a:ext cx="4991147" cy="4754880"/>
           </a:xfrm>
           <a:prstGeom prst="rect">
             <a:avLst/>
@@ -6597,7 +6711,7 @@
                 </a:solidFill>
                 <a:latin typeface="Calibri"/>
               </a:rPr>
-              <a:t>The heaviest wire is not always inside</a:t>
+              <a:t>Grow from A, step by step</a:t>
             </a:r>
           </a:p>
         </p:txBody>
@@ -6642,7 +6756,7 @@
                 </a:solidFill>
                 <a:latin typeface="Calibri"/>
               </a:rPr>
-              <a:t>Here are two triangles, joined by one bridge, C–D, with weight four</a:t>
+              <a:t>The heaviest edge leaving A goes to B, with weight five, so B joins A</a:t>
             </a:r>
           </a:p>
           <a:p>
@@ -6664,102 +6778,14 @@
                 </a:solidFill>
                 <a:latin typeface="Calibri"/>
               </a:rPr>
-              <a:t>Every triangle edge weighs three</a:t>
-            </a:r>
-          </a:p>
-          <a:p>
-            <a:pPr lvl="0" marL="457200" indent="-228600">
-              <a:buFont typeface="Calibri"/>
-              <a:spcAft>
-                <a:spcPts val="1000"/>
-              </a:spcAft>
-              <a:buSzPct val="100000"/>
-              <a:buChar char="•"/>
-              <a:lnSpc>
-                <a:spcPts val="2200"/>
-              </a:lnSpc>
-            </a:pPr>
-            <a:r>
-              <a:rPr sz="2000" b="0">
-                <a:solidFill>
-                  <a:srgbClr val="333333"/>
-                </a:solidFill>
-                <a:latin typeface="Calibri"/>
-              </a:rPr>
-              <a:t>The natural split puts one triangle on each side, and cuts only the bridge</a:t>
-            </a:r>
-          </a:p>
-          <a:p>
-            <a:pPr lvl="0" marL="457200" indent="-228600">
-              <a:buFont typeface="Calibri"/>
-              <a:spcAft>
-                <a:spcPts val="1000"/>
-              </a:spcAft>
-              <a:buSzPct val="100000"/>
-              <a:buChar char="•"/>
-              <a:lnSpc>
-                <a:spcPts val="2200"/>
-              </a:lnSpc>
-            </a:pPr>
-            <a:r>
-              <a:rPr sz="2000" b="0">
-                <a:solidFill>
-                  <a:srgbClr val="333333"/>
-                </a:solidFill>
-                <a:latin typeface="Calibri"/>
-              </a:rPr>
-              <a:t>But greedy starts from the heaviest edge, and here that is the bridge itself</a:t>
-            </a:r>
-          </a:p>
-          <a:p>
-            <a:pPr lvl="0" marL="457200" indent="-228600">
-              <a:buFont typeface="Calibri"/>
-              <a:spcAft>
-                <a:spcPts val="1000"/>
-              </a:spcAft>
-              <a:buSzPct val="100000"/>
-              <a:buChar char="•"/>
-              <a:lnSpc>
-                <a:spcPts val="2200"/>
-              </a:lnSpc>
-            </a:pPr>
-            <a:r>
-              <a:rPr sz="2000" b="0">
-                <a:solidFill>
-                  <a:srgbClr val="333333"/>
-                </a:solidFill>
-                <a:latin typeface="Calibri"/>
-              </a:rPr>
-              <a:t>So C and D begin on the same side, and the cut ends up at twelve</a:t>
-            </a:r>
-          </a:p>
-          <a:p>
-            <a:pPr lvl="0" marL="457200" indent="-228600">
-              <a:buFont typeface="Calibri"/>
-              <a:spcAft>
-                <a:spcPts val="1000"/>
-              </a:spcAft>
-              <a:buSzPct val="100000"/>
-              <a:buChar char="•"/>
-              <a:lnSpc>
-                <a:spcPts val="2200"/>
-              </a:lnSpc>
-            </a:pPr>
-            <a:r>
-              <a:rPr sz="2000" b="0">
-                <a:solidFill>
-                  <a:srgbClr val="333333"/>
-                </a:solidFill>
-                <a:latin typeface="Calibri"/>
-              </a:rPr>
-              <a:t>Grow from A keeps its triangle together, and cuts only the bridge: four</a:t>
+              <a:t>With two cells, the side is full, and it stops</a:t>
             </a:r>
           </a:p>
         </p:txBody>
       </p:sp>
       <p:pic>
         <p:nvPicPr>
-          <p:cNvPr id="4" name="Picture 3" descr="bridge-graph.png"/>
+          <p:cNvPr id="4" name="Picture 3" descr="grow-a-2.png"/>
           <p:cNvPicPr>
             <a:picLocks noChangeAspect="1"/>
           </p:cNvPicPr>
@@ -6774,7 +6800,7 @@
         <p:spPr>
           <a:xfrm>
             <a:off x="6172200" y="1234440"/>
-            <a:ext cx="4007853" cy="4754879"/>
+            <a:ext cx="4991147" cy="4754880"/>
           </a:xfrm>
           <a:prstGeom prst="rect">
             <a:avLst/>
@@ -6872,14 +6898,103 @@
                 </a:solidFill>
                 <a:latin typeface="Calibri"/>
               </a:rPr>
-              <a:t>Browser lab track</a:t>
+              <a:t>Grow from A: AB|CDE cut 5</a:t>
+            </a:r>
+          </a:p>
+        </p:txBody>
+      </p:sp>
+      <p:sp>
+        <p:nvSpPr>
+          <p:cNvPr id="3" name="TextBox 2"/>
+          <p:cNvSpPr txBox="1"/>
+          <p:nvPr/>
+        </p:nvSpPr>
+        <p:spPr>
+          <a:xfrm>
+            <a:off x="548640" y="1234440"/>
+            <a:ext cx="5303520" cy="4754880"/>
+          </a:xfrm>
+          <a:prstGeom prst="rect">
+            <a:avLst/>
+          </a:prstGeom>
+          <a:noFill/>
+        </p:spPr>
+        <p:txBody>
+          <a:bodyPr wrap="square">
+            <a:noAutofit/>
+          </a:bodyPr>
+          <a:lstStyle/>
+          <a:p>
+            <a:pPr lvl="0" marL="457200" indent="-228600">
+              <a:buFont typeface="Calibri"/>
+              <a:spcAft>
+                <a:spcPts val="1000"/>
+              </a:spcAft>
+              <a:buSzPct val="100000"/>
+              <a:buChar char="•"/>
+              <a:lnSpc>
+                <a:spcPts val="2200"/>
+              </a:lnSpc>
+            </a:pPr>
+            <a:r>
+              <a:rPr sz="2000" b="0">
+                <a:solidFill>
+                  <a:srgbClr val="333333"/>
+                </a:solidFill>
+                <a:latin typeface="Calibri"/>
+              </a:rPr>
+              <a:t>C, D and E form the other side, so A–C and B–C are cut</a:t>
+            </a:r>
+          </a:p>
+          <a:p>
+            <a:pPr lvl="0" marL="457200" indent="-228600">
+              <a:buFont typeface="Calibri"/>
+              <a:spcAft>
+                <a:spcPts val="1000"/>
+              </a:spcAft>
+              <a:buSzPct val="100000"/>
+              <a:buChar char="•"/>
+              <a:lnSpc>
+                <a:spcPts val="2200"/>
+              </a:lnSpc>
+            </a:pPr>
+            <a:r>
+              <a:rPr sz="2000" b="0">
+                <a:solidFill>
+                  <a:srgbClr val="333333"/>
+                </a:solidFill>
+                <a:latin typeface="Calibri"/>
+              </a:rPr>
+              <a:t>One plus four makes five, which is worse than three</a:t>
+            </a:r>
+          </a:p>
+          <a:p>
+            <a:pPr lvl="0" marL="457200" indent="-228600">
+              <a:buFont typeface="Calibri"/>
+              <a:spcAft>
+                <a:spcPts val="1000"/>
+              </a:spcAft>
+              <a:buSzPct val="100000"/>
+              <a:buChar char="•"/>
+              <a:lnSpc>
+                <a:spcPts val="2200"/>
+              </a:lnSpc>
+            </a:pPr>
+            <a:r>
+              <a:rPr sz="2000" b="0">
+                <a:solidFill>
+                  <a:srgbClr val="333333"/>
+                </a:solidFill>
+                <a:latin typeface="Calibri"/>
+              </a:rPr>
+              <a:t>Starting from C is even worse: a cut of nine</a:t>
             </a:r>
           </a:p>
         </p:txBody>
       </p:sp>
       <p:pic>
         <p:nvPicPr>
-          <p:cNvPr id="3" name="Picture 2" descr="lab-starter.png"/>
+          <p:cNvPr id="4" name="Picture 3" descr="grow-a.png"/>
           <p:cNvPicPr>
             <a:picLocks noChangeAspect="1"/>
           </p:cNvPicPr>
@@ -6893,53 +7008,14 @@
         </p:blipFill>
         <p:spPr>
           <a:xfrm>
-            <a:off x="548640" y="1143000"/>
-            <a:ext cx="5418666" cy="4571999"/>
+            <a:off x="6172200" y="1234440"/>
+            <a:ext cx="4991147" cy="4754880"/>
           </a:xfrm>
           <a:prstGeom prst="rect">
             <a:avLst/>
           </a:prstGeom>
         </p:spPr>
       </p:pic>
-      <p:sp>
-        <p:nvSpPr>
-          <p:cNvPr id="4" name="TextBox 3"/>
-          <p:cNvSpPr txBox="1"/>
-          <p:nvPr/>
-        </p:nvSpPr>
-        <p:spPr>
-          <a:xfrm>
-            <a:off x="548640" y="5897880"/>
-            <a:ext cx="11064240" cy="411480"/>
-          </a:xfrm>
-          <a:prstGeom prst="rect">
-            <a:avLst/>
-          </a:prstGeom>
-          <a:noFill/>
-        </p:spPr>
-        <p:txBody>
-          <a:bodyPr wrap="square">
-            <a:noAutofit/>
-          </a:bodyPr>
-          <a:lstStyle/>
-          <a:p>
-            <a:pPr>
-              <a:lnSpc>
-                <a:spcPts val="2200"/>
-              </a:lnSpc>
-            </a:pPr>
-            <a:r>
-              <a:rPr sz="1200" b="0">
-                <a:solidFill>
-                  <a:srgbClr val="333333"/>
-                </a:solidFill>
-                <a:latin typeface="Calibri"/>
-              </a:rPr>
-              <a:t>Browser lab starter</a:t>
-            </a:r>
-          </a:p>
-        </p:txBody>
-      </p:sp>
       <p:sp>
         <p:nvSpPr>
           <p:cNvPr id="5" name="TextBox 4"/>
@@ -7031,45 +7107,21 @@
                 </a:solidFill>
                 <a:latin typeface="Calibri"/>
               </a:rPr>
-              <a:t>Implement track</a:t>
-            </a:r>
-          </a:p>
-        </p:txBody>
-      </p:sp>
-      <p:pic>
-        <p:nvPicPr>
-          <p:cNvPr id="3" name="Picture 2" descr="real-shell.png"/>
-          <p:cNvPicPr>
-            <a:picLocks noChangeAspect="1"/>
-          </p:cNvPicPr>
-          <p:nvPr/>
-        </p:nvPicPr>
-        <p:blipFill>
-          <a:blip r:embed="rId2"/>
-          <a:stretch>
-            <a:fillRect/>
-          </a:stretch>
-        </p:blipFill>
-        <p:spPr>
-          <a:xfrm>
-            <a:off x="548640" y="1143000"/>
-            <a:ext cx="9160625" cy="4572000"/>
-          </a:xfrm>
-          <a:prstGeom prst="rect">
-            <a:avLst/>
-          </a:prstGeom>
-        </p:spPr>
-      </p:pic>
-      <p:sp>
-        <p:nvSpPr>
-          <p:cNvPr id="4" name="TextBox 3"/>
+              <a:t>Keep the best legal start</a:t>
+            </a:r>
+          </a:p>
+        </p:txBody>
+      </p:sp>
+      <p:sp>
+        <p:nvSpPr>
+          <p:cNvPr id="3" name="TextBox 2"/>
           <p:cNvSpPr txBox="1"/>
           <p:nvPr/>
         </p:nvSpPr>
         <p:spPr>
           <a:xfrm>
-            <a:off x="548640" y="5897880"/>
-            <a:ext cx="11064240" cy="411480"/>
+            <a:off x="548640" y="1234440"/>
+            <a:ext cx="11064240" cy="4937760"/>
           </a:xfrm>
           <a:prstGeom prst="rect">
             <a:avLst/>
@@ -7082,26 +7134,142 @@
           </a:bodyPr>
           <a:lstStyle/>
           <a:p>
-            <a:pPr>
-              <a:lnSpc>
-                <a:spcPts val="2200"/>
-              </a:lnSpc>
-            </a:pPr>
-            <a:r>
-              <a:rPr sz="1200" b="0">
+            <a:pPr lvl="0" marL="457200" indent="-228600">
+              <a:buFont typeface="Calibri"/>
+              <a:spcAft>
+                <a:spcPts val="1000"/>
+              </a:spcAft>
+              <a:buSzPct val="100000"/>
+              <a:buChar char="•"/>
+              <a:lnSpc>
+                <a:spcPts val="2200"/>
+              </a:lnSpc>
+            </a:pPr>
+            <a:r>
+              <a:rPr sz="2000" b="0">
                 <a:solidFill>
                   <a:srgbClr val="333333"/>
                 </a:solidFill>
                 <a:latin typeface="Calibri"/>
               </a:rPr>
-              <a:t>Real shell session</a:t>
-            </a:r>
-          </a:p>
-        </p:txBody>
-      </p:sp>
-      <p:sp>
-        <p:nvSpPr>
-          <p:cNvPr id="5" name="TextBox 4"/>
+              <a:t>The fix is simple: try several starts, keep the best</a:t>
+            </a:r>
+          </a:p>
+          <a:p>
+            <a:pPr lvl="0" marL="457200" indent="-228600">
+              <a:buFont typeface="Calibri"/>
+              <a:spcAft>
+                <a:spcPts val="1000"/>
+              </a:spcAft>
+              <a:buSzPct val="100000"/>
+              <a:buChar char="•"/>
+              <a:lnSpc>
+                <a:spcPts val="2200"/>
+              </a:lnSpc>
+            </a:pPr>
+            <a:r>
+              <a:rPr sz="2000" b="0">
+                <a:solidFill>
+                  <a:srgbClr val="333333"/>
+                </a:solidFill>
+                <a:latin typeface="Calibri"/>
+              </a:rPr>
+              <a:t>Build a few random seeds, greedy, and grow from every node</a:t>
+            </a:r>
+          </a:p>
+          <a:p>
+            <a:pPr lvl="0" marL="457200" indent="-228600">
+              <a:buFont typeface="Calibri"/>
+              <a:spcAft>
+                <a:spcPts val="1000"/>
+              </a:spcAft>
+              <a:buSzPct val="100000"/>
+              <a:buChar char="•"/>
+              <a:lnSpc>
+                <a:spcPts val="2200"/>
+              </a:lnSpc>
+            </a:pPr>
+            <a:r>
+              <a:rPr sz="2000" b="0">
+                <a:solidFill>
+                  <a:srgbClr val="333333"/>
+                </a:solidFill>
+                <a:latin typeface="Calibri"/>
+              </a:rPr>
+              <a:t>Drop any split that breaks the size rule, then keep the smallest cut</a:t>
+            </a:r>
+          </a:p>
+          <a:p>
+            <a:pPr lvl="0" marL="457200" indent="-228600">
+              <a:buFont typeface="Calibri"/>
+              <a:spcAft>
+                <a:spcPts val="1000"/>
+              </a:spcAft>
+              <a:buSzPct val="100000"/>
+              <a:buChar char="•"/>
+              <a:lnSpc>
+                <a:spcPts val="2200"/>
+              </a:lnSpc>
+            </a:pPr>
+            <a:r>
+              <a:rPr sz="2000" b="0">
+                <a:solidFill>
+                  <a:srgbClr val="333333"/>
+                </a:solidFill>
+                <a:latin typeface="Calibri"/>
+              </a:rPr>
+              <a:t>Here, greedy and the five grows give three, five, five, nine, three and three</a:t>
+            </a:r>
+          </a:p>
+          <a:p>
+            <a:pPr lvl="0" marL="457200" indent="-228600">
+              <a:buFont typeface="Calibri"/>
+              <a:spcAft>
+                <a:spcPts val="1000"/>
+              </a:spcAft>
+              <a:buSzPct val="100000"/>
+              <a:buChar char="•"/>
+              <a:lnSpc>
+                <a:spcPts val="2200"/>
+              </a:lnSpc>
+            </a:pPr>
+            <a:r>
+              <a:rPr sz="2000" b="0">
+                <a:solidFill>
+                  <a:srgbClr val="333333"/>
+                </a:solidFill>
+                <a:latin typeface="Calibri"/>
+              </a:rPr>
+              <a:t>So the best is three: A, B and C against D and E</a:t>
+            </a:r>
+          </a:p>
+          <a:p>
+            <a:pPr lvl="0" marL="457200" indent="-228600">
+              <a:buFont typeface="Calibri"/>
+              <a:spcAft>
+                <a:spcPts val="1000"/>
+              </a:spcAft>
+              <a:buSzPct val="100000"/>
+              <a:buChar char="•"/>
+              <a:lnSpc>
+                <a:spcPts val="2200"/>
+              </a:lnSpc>
+            </a:pPr>
+            <a:r>
+              <a:rPr sz="2000" b="0">
+                <a:solidFill>
+                  <a:srgbClr val="333333"/>
+                </a:solidFill>
+                <a:latin typeface="Calibri"/>
+              </a:rPr>
+              <a:t>Pause and guess: can a smaller cut ever be the worse choice?</a:t>
+            </a:r>
+          </a:p>
+        </p:txBody>
+      </p:sp>
+      <p:sp>
+        <p:nvSpPr>
+          <p:cNvPr id="4" name="TextBox 3"/>
           <p:cNvSpPr txBox="1"/>
           <p:nvPr/>
         </p:nvSpPr>
@@ -7190,7 +7358,7 @@
                 </a:solidFill>
                 <a:latin typeface="Calibri"/>
               </a:rPr>
-              <a:t>Implement track — try these</a:t>
+              <a:t>Keep the best legal start — try these</a:t>
             </a:r>
           </a:p>
         </p:txBody>
@@ -7234,7 +7402,7 @@
                 </a:solidFill>
                 <a:latin typeface="Consolas"/>
               </a:rPr>
-              <a:t># print every correct answer</a:t>
+              <a:t>best_start(graph):</a:t>
             </a:r>
           </a:p>
           <a:p>
@@ -7253,7 +7421,7 @@
                 </a:solidFill>
                 <a:latin typeface="Consolas"/>
               </a:rPr>
-              <a:t>python3 examples/initial_bipartition_check.py --show</a:t>
+              <a:t>  starts = random(seed) for a few seeds</a:t>
             </a:r>
           </a:p>
           <a:p>
@@ -7272,7 +7440,7 @@
                 </a:solidFill>
                 <a:latin typeface="Consolas"/>
               </a:rPr>
-              <a:t/>
+              <a:t>         + greedy</a:t>
             </a:r>
           </a:p>
           <a:p>
@@ -7291,7 +7459,7 @@
                 </a:solidFill>
                 <a:latin typeface="Consolas"/>
               </a:rPr>
-              <a:t># check your own functions</a:t>
+              <a:t>         + grow(x) for every node x</a:t>
             </a:r>
           </a:p>
           <a:p>
@@ -7310,7 +7478,26 @@
                 </a:solidFill>
                 <a:latin typeface="Consolas"/>
               </a:rPr>
-              <a:t>python3 examples/initial_bipartition_check.py --impl my_init.py</a:t>
+              <a:t>  drop every start that is not legal</a:t>
+            </a:r>
+          </a:p>
+          <a:p>
+            <a:pPr>
+              <a:lnSpc>
+                <a:spcPts val="2200"/>
+              </a:lnSpc>
+              <a:spcAft>
+                <a:spcPts val="400"/>
+              </a:spcAft>
+            </a:pPr>
+            <a:r>
+              <a:rPr sz="2000" b="0">
+                <a:solidFill>
+                  <a:srgbClr val="333333"/>
+                </a:solidFill>
+                <a:latin typeface="Consolas"/>
+              </a:rPr>
+              <a:t>  return the start with the smallest cutsize</a:t>
             </a:r>
           </a:p>
         </p:txBody>
@@ -7473,7 +7660,7 @@
                 </a:solidFill>
                 <a:latin typeface="Calibri"/>
               </a:rPr>
-              <a:t>We draw each cell as a dot, called a node</a:t>
+              <a:t>Our example has five cells, named A to E</a:t>
             </a:r>
           </a:p>
           <a:p>
@@ -7495,80 +7682,14 @@
                 </a:solidFill>
                 <a:latin typeface="Calibri"/>
               </a:rPr>
-              <a:t>A line between two nodes is an edge: it means the two cells are wired together</a:t>
-            </a:r>
-          </a:p>
-          <a:p>
-            <a:pPr lvl="0" marL="457200" indent="-228600">
-              <a:buFont typeface="Calibri"/>
-              <a:spcAft>
-                <a:spcPts val="1000"/>
-              </a:spcAft>
-              <a:buSzPct val="100000"/>
-              <a:buChar char="•"/>
-              <a:lnSpc>
-                <a:spcPts val="2200"/>
-              </a:lnSpc>
-            </a:pPr>
-            <a:r>
-              <a:rPr sz="2000" b="0">
-                <a:solidFill>
-                  <a:srgbClr val="333333"/>
-                </a:solidFill>
-                <a:latin typeface="Calibri"/>
-              </a:rPr>
-              <a:t>The number on an edge is its weight: how many wires join the pair</a:t>
-            </a:r>
-          </a:p>
-          <a:p>
-            <a:pPr lvl="0" marL="457200" indent="-228600">
-              <a:buFont typeface="Calibri"/>
-              <a:spcAft>
-                <a:spcPts val="1000"/>
-              </a:spcAft>
-              <a:buSzPct val="100000"/>
-              <a:buChar char="•"/>
-              <a:lnSpc>
-                <a:spcPts val="2200"/>
-              </a:lnSpc>
-            </a:pPr>
-            <a:r>
-              <a:rPr sz="2000" b="0">
-                <a:solidFill>
-                  <a:srgbClr val="333333"/>
-                </a:solidFill>
-                <a:latin typeface="Calibri"/>
-              </a:rPr>
-              <a:t>Our example has five cells, A to E</a:t>
-            </a:r>
-          </a:p>
-          <a:p>
-            <a:pPr lvl="0" marL="457200" indent="-228600">
-              <a:buFont typeface="Calibri"/>
-              <a:spcAft>
-                <a:spcPts val="1000"/>
-              </a:spcAft>
-              <a:buSzPct val="100000"/>
-              <a:buChar char="•"/>
-              <a:lnSpc>
-                <a:spcPts val="2200"/>
-              </a:lnSpc>
-            </a:pPr>
-            <a:r>
-              <a:rPr sz="2000" b="0">
-                <a:solidFill>
-                  <a:srgbClr val="333333"/>
-                </a:solidFill>
-                <a:latin typeface="Calibri"/>
-              </a:rPr>
-              <a:t>The heaviest edges, A–B and D–E, have five wires each</a:t>
+              <a:t>Some pairs share many wires, others only one</a:t>
             </a:r>
           </a:p>
         </p:txBody>
       </p:sp>
       <p:pic>
         <p:nvPicPr>
-          <p:cNvPr id="4" name="Picture 3" descr="chip-to-graph.png"/>
+          <p:cNvPr id="4" name="Picture 3" descr="chip-to-graph-1.png"/>
           <p:cNvPicPr>
             <a:picLocks noChangeAspect="1"/>
           </p:cNvPicPr>
@@ -7681,7 +7802,7 @@
                 </a:solidFill>
                 <a:latin typeface="Calibri"/>
               </a:rPr>
-              <a:t>Pitfalls to watch</a:t>
+              <a:t>Trap 1: no size limit</a:t>
             </a:r>
           </a:p>
         </p:txBody>
@@ -7695,7 +7816,7 @@
         <p:spPr>
           <a:xfrm>
             <a:off x="548640" y="1234440"/>
-            <a:ext cx="11064240" cy="4937760"/>
+            <a:ext cx="5303520" cy="4754880"/>
           </a:xfrm>
           <a:prstGeom prst="rect">
             <a:avLst/>
@@ -7726,7 +7847,7 @@
                 </a:solidFill>
                 <a:latin typeface="Calibri"/>
               </a:rPr>
-              <a:t>Watch out for four common mistakes</a:t>
+              <a:t>Three traps can fool a method that looks sensible</a:t>
             </a:r>
           </a:p>
           <a:p>
@@ -7748,7 +7869,7 @@
                 </a:solidFill>
                 <a:latin typeface="Calibri"/>
               </a:rPr>
-              <a:t>Reporting the cutsize without the balance</a:t>
+              <a:t>And yes, a smaller cut can be the worse choice</a:t>
             </a:r>
           </a:p>
           <a:p>
@@ -7770,7 +7891,7 @@
                 </a:solidFill>
                 <a:latin typeface="Calibri"/>
               </a:rPr>
-              <a:t>Letting one side grow past its limit, which makes the cut look better than it really is</a:t>
+              <a:t>Here is a star: A in the middle, wired to five other cells</a:t>
             </a:r>
           </a:p>
           <a:p>
@@ -7792,7 +7913,7 @@
                 </a:solidFill>
                 <a:latin typeface="Calibri"/>
               </a:rPr>
-              <a:t>Trusting a single random seed: on our graph, the cut ranged from three to sixteen</a:t>
+              <a:t>An older greedy had no size limit, so it kept adding cells next to A</a:t>
             </a:r>
           </a:p>
           <a:p>
@@ -7814,14 +7935,38 @@
                 </a:solidFill>
                 <a:latin typeface="Calibri"/>
               </a:rPr>
-              <a:t>And breaking ties by the order of the input, so the answer changes when the file changes</a:t>
-            </a:r>
-          </a:p>
-        </p:txBody>
-      </p:sp>
-      <p:sp>
-        <p:nvSpPr>
-          <p:cNvPr id="4" name="TextBox 3"/>
+              <a:t>It ended with five cells against one, and a cut of five</a:t>
+            </a:r>
+          </a:p>
+        </p:txBody>
+      </p:sp>
+      <p:pic>
+        <p:nvPicPr>
+          <p:cNvPr id="4" name="Picture 3" descr="star-cap-1.png"/>
+          <p:cNvPicPr>
+            <a:picLocks noChangeAspect="1"/>
+          </p:cNvPicPr>
+          <p:nvPr/>
+        </p:nvPicPr>
+        <p:blipFill>
+          <a:blip r:embed="rId2"/>
+          <a:stretch>
+            <a:fillRect/>
+          </a:stretch>
+        </p:blipFill>
+        <p:spPr>
+          <a:xfrm>
+            <a:off x="6172200" y="1234440"/>
+            <a:ext cx="3733215" cy="4754879"/>
+          </a:xfrm>
+          <a:prstGeom prst="rect">
+            <a:avLst/>
+          </a:prstGeom>
+        </p:spPr>
+      </p:pic>
+      <p:sp>
+        <p:nvSpPr>
+          <p:cNvPr id="5" name="TextBox 4"/>
           <p:cNvSpPr txBox="1"/>
           <p:nvPr/>
         </p:nvSpPr>
@@ -7910,7 +8055,7 @@
                 </a:solidFill>
                 <a:latin typeface="Calibri"/>
               </a:rPr>
-              <a:t>Recap: three ways to start</a:t>
+              <a:t>Trap 1: the size limit fixes it</a:t>
             </a:r>
           </a:p>
         </p:txBody>
@@ -7924,7 +8069,7 @@
         <p:spPr>
           <a:xfrm>
             <a:off x="548640" y="1234440"/>
-            <a:ext cx="11064240" cy="4937760"/>
+            <a:ext cx="5303520" cy="4754880"/>
           </a:xfrm>
           <a:prstGeom prst="rect">
             <a:avLst/>
@@ -7955,7 +8100,7 @@
                 </a:solidFill>
                 <a:latin typeface="Calibri"/>
               </a:rPr>
-              <a:t>Methods like KL and FM need a legal first split</a:t>
+              <a:t>With six cells, each side must hold exactly three, so that split is not legal</a:t>
             </a:r>
           </a:p>
           <a:p>
@@ -7977,7 +8122,7 @@
                 </a:solidFill>
                 <a:latin typeface="Calibri"/>
               </a:rPr>
-              <a:t>Random shuffles and deals: it is fast, but it depends on luck</a:t>
+              <a:t>Our greedy stops each side at three cells, and gets fifteen</a:t>
             </a:r>
           </a:p>
           <a:p>
@@ -7999,80 +8144,38 @@
                 </a:solidFill>
                 <a:latin typeface="Calibri"/>
               </a:rPr>
-              <a:t>Greedy keeps the heaviest edge inside, then puts each cell where it cuts less</a:t>
-            </a:r>
-          </a:p>
-          <a:p>
-            <a:pPr lvl="0" marL="457200" indent="-228600">
-              <a:buFont typeface="Calibri"/>
-              <a:spcAft>
-                <a:spcPts val="1000"/>
-              </a:spcAft>
-              <a:buSzPct val="100000"/>
-              <a:buChar char="•"/>
-              <a:lnSpc>
-                <a:spcPts val="2200"/>
-              </a:lnSpc>
-            </a:pPr>
-            <a:r>
-              <a:rPr sz="2000" b="0">
-                <a:solidFill>
-                  <a:srgbClr val="333333"/>
-                </a:solidFill>
-                <a:latin typeface="Calibri"/>
-              </a:rPr>
-              <a:t>Grow spreads from a start node, so the start node matters</a:t>
-            </a:r>
-          </a:p>
-          <a:p>
-            <a:pPr lvl="0" marL="457200" indent="-228600">
-              <a:buFont typeface="Calibri"/>
-              <a:spcAft>
-                <a:spcPts val="1000"/>
-              </a:spcAft>
-              <a:buSzPct val="100000"/>
-              <a:buChar char="•"/>
-              <a:lnSpc>
-                <a:spcPts val="2200"/>
-              </a:lnSpc>
-            </a:pPr>
-            <a:r>
-              <a:rPr sz="2000" b="0">
-                <a:solidFill>
-                  <a:srgbClr val="333333"/>
-                </a:solidFill>
-                <a:latin typeface="Calibri"/>
-              </a:rPr>
-              <a:t>Ties and size limits can change the answer</a:t>
-            </a:r>
-          </a:p>
-          <a:p>
-            <a:pPr lvl="0" marL="457200" indent="-228600">
-              <a:buFont typeface="Calibri"/>
-              <a:spcAft>
-                <a:spcPts val="1000"/>
-              </a:spcAft>
-              <a:buSzPct val="100000"/>
-              <a:buChar char="•"/>
-              <a:lnSpc>
-                <a:spcPts val="2200"/>
-              </a:lnSpc>
-            </a:pPr>
-            <a:r>
-              <a:rPr sz="2000" b="0">
-                <a:solidFill>
-                  <a:srgbClr val="333333"/>
-                </a:solidFill>
-                <a:latin typeface="Calibri"/>
-              </a:rPr>
-              <a:t>So build several starts, keep only the legal ones, and pick the smallest cut</a:t>
-            </a:r>
-          </a:p>
-        </p:txBody>
-      </p:sp>
-      <p:sp>
-        <p:nvSpPr>
-          <p:cNvPr id="4" name="TextBox 3"/>
+              <a:t>No legal split of this star does better</a:t>
+            </a:r>
+          </a:p>
+        </p:txBody>
+      </p:sp>
+      <p:pic>
+        <p:nvPicPr>
+          <p:cNvPr id="4" name="Picture 3" descr="star-cap.png"/>
+          <p:cNvPicPr>
+            <a:picLocks noChangeAspect="1"/>
+          </p:cNvPicPr>
+          <p:nvPr/>
+        </p:nvPicPr>
+        <p:blipFill>
+          <a:blip r:embed="rId2"/>
+          <a:stretch>
+            <a:fillRect/>
+          </a:stretch>
+        </p:blipFill>
+        <p:spPr>
+          <a:xfrm>
+            <a:off x="6172200" y="1234440"/>
+            <a:ext cx="3733215" cy="4754879"/>
+          </a:xfrm>
+          <a:prstGeom prst="rect">
+            <a:avLst/>
+          </a:prstGeom>
+        </p:spPr>
+      </p:pic>
+      <p:sp>
+        <p:nvSpPr>
+          <p:cNvPr id="5" name="TextBox 4"/>
           <p:cNvSpPr txBox="1"/>
           <p:nvPr/>
         </p:nvSpPr>
@@ -8161,7 +8264,7 @@
                 </a:solidFill>
                 <a:latin typeface="Calibri"/>
               </a:rPr>
-              <a:t>Your turn</a:t>
+              <a:t>Trap 2: a tie can decide the answer</a:t>
             </a:r>
           </a:p>
         </p:txBody>
@@ -8175,7 +8278,7 @@
         <p:spPr>
           <a:xfrm>
             <a:off x="548640" y="1234440"/>
-            <a:ext cx="11064240" cy="4937760"/>
+            <a:ext cx="5303520" cy="4754880"/>
           </a:xfrm>
           <a:prstGeom prst="rect">
             <a:avLst/>
@@ -8206,7 +8309,7 @@
                 </a:solidFill>
                 <a:latin typeface="Calibri"/>
               </a:rPr>
-              <a:t>Now it's your turn</a:t>
+              <a:t>In this graph, A–B and D–E both weigh five</a:t>
             </a:r>
           </a:p>
           <a:p>
@@ -8228,7 +8331,7 @@
                 </a:solidFill>
                 <a:latin typeface="Calibri"/>
               </a:rPr>
-              <a:t>Pick a track: the browser lab, the Python track, or both</a:t>
+              <a:t>Greedy must pick one of them to start from</a:t>
             </a:r>
           </a:p>
           <a:p>
@@ -8250,9 +8353,152 @@
                 </a:solidFill>
                 <a:latin typeface="Calibri"/>
               </a:rPr>
-              <a:t>Tick each box of the checklist as you go</a:t>
-            </a:r>
-          </a:p>
+              <a:t>The rule picks the smaller name, A–B, and that gives a cut of nine</a:t>
+            </a:r>
+          </a:p>
+        </p:txBody>
+      </p:sp>
+      <p:pic>
+        <p:nvPicPr>
+          <p:cNvPr id="4" name="Picture 3" descr="tie-graph-1.png"/>
+          <p:cNvPicPr>
+            <a:picLocks noChangeAspect="1"/>
+          </p:cNvPicPr>
+          <p:nvPr/>
+        </p:nvPicPr>
+        <p:blipFill>
+          <a:blip r:embed="rId2"/>
+          <a:stretch>
+            <a:fillRect/>
+          </a:stretch>
+        </p:blipFill>
+        <p:spPr>
+          <a:xfrm>
+            <a:off x="6172200" y="1234440"/>
+            <a:ext cx="4007853" cy="4754879"/>
+          </a:xfrm>
+          <a:prstGeom prst="rect">
+            <a:avLst/>
+          </a:prstGeom>
+        </p:spPr>
+      </p:pic>
+      <p:sp>
+        <p:nvSpPr>
+          <p:cNvPr id="5" name="TextBox 4"/>
+          <p:cNvSpPr txBox="1"/>
+          <p:nvPr/>
+        </p:nvSpPr>
+        <p:spPr>
+          <a:xfrm>
+            <a:off x="548640" y="6355080"/>
+            <a:ext cx="11064240" cy="320040"/>
+          </a:xfrm>
+          <a:prstGeom prst="rect">
+            <a:avLst/>
+          </a:prstGeom>
+          <a:noFill/>
+        </p:spPr>
+        <p:txBody>
+          <a:bodyPr wrap="square">
+            <a:noAutofit/>
+          </a:bodyPr>
+          <a:lstStyle/>
+          <a:p>
+            <a:pPr algn="r">
+              <a:lnSpc>
+                <a:spcPts val="2200"/>
+              </a:lnSpc>
+              <a:defRPr sz="1000" b="0">
+                <a:solidFill>
+                  <a:srgbClr val="666666"/>
+                </a:solidFill>
+                <a:latin typeface="Calibri"/>
+              </a:defRPr>
+            </a:pPr>
+            <a:r>
+              <a:t>learn_partitioning — 03 initial bipartition</a:t>
+            </a:r>
+          </a:p>
+        </p:txBody>
+      </p:sp>
+    </p:spTree>
+  </p:cSld>
+  <p:clrMapOvr>
+    <a:masterClrMapping/>
+  </p:clrMapOvr>
+</p:sld>
+</file>
+
+<file path=ppt/slides/slide23.xml><?xml version="1.0" encoding="utf-8"?>
+<p:sld xmlns:a="http://schemas.openxmlformats.org/drawingml/2006/main" xmlns:p="http://schemas.openxmlformats.org/presentationml/2006/main" xmlns:r="http://schemas.openxmlformats.org/officeDocument/2006/relationships">
+  <p:cSld>
+    <p:spTree>
+      <p:nvGrpSpPr>
+        <p:cNvPr id="1" name=""/>
+        <p:cNvGrpSpPr/>
+        <p:nvPr/>
+      </p:nvGrpSpPr>
+      <p:grpSpPr/>
+      <p:sp>
+        <p:nvSpPr>
+          <p:cNvPr id="2" name="TextBox 1"/>
+          <p:cNvSpPr txBox="1"/>
+          <p:nvPr/>
+        </p:nvSpPr>
+        <p:spPr>
+          <a:xfrm>
+            <a:off x="548640" y="411480"/>
+            <a:ext cx="11064240" cy="777240"/>
+          </a:xfrm>
+          <a:prstGeom prst="rect">
+            <a:avLst/>
+          </a:prstGeom>
+          <a:noFill/>
+        </p:spPr>
+        <p:txBody>
+          <a:bodyPr wrap="square">
+            <a:noAutofit/>
+          </a:bodyPr>
+          <a:lstStyle/>
+          <a:p>
+            <a:pPr>
+              <a:lnSpc>
+                <a:spcPts val="2200"/>
+              </a:lnSpc>
+            </a:pPr>
+            <a:r>
+              <a:rPr sz="2800" b="1">
+                <a:solidFill>
+                  <a:srgbClr val="1A1A2E"/>
+                </a:solidFill>
+                <a:latin typeface="Calibri"/>
+              </a:rPr>
+              <a:t>Trap 2: the other anchor</a:t>
+            </a:r>
+          </a:p>
+        </p:txBody>
+      </p:sp>
+      <p:sp>
+        <p:nvSpPr>
+          <p:cNvPr id="3" name="TextBox 2"/>
+          <p:cNvSpPr txBox="1"/>
+          <p:nvPr/>
+        </p:nvSpPr>
+        <p:spPr>
+          <a:xfrm>
+            <a:off x="548640" y="1234440"/>
+            <a:ext cx="5303520" cy="4754880"/>
+          </a:xfrm>
+          <a:prstGeom prst="rect">
+            <a:avLst/>
+          </a:prstGeom>
+          <a:noFill/>
+        </p:spPr>
+        <p:txBody>
+          <a:bodyPr wrap="square">
+            <a:noAutofit/>
+          </a:bodyPr>
+          <a:lstStyle/>
           <a:p>
             <a:pPr lvl="0" marL="457200" indent="-228600">
               <a:buFont typeface="Calibri"/>
@@ -8272,7 +8518,7 @@
                 </a:solidFill>
                 <a:latin typeface="Calibri"/>
               </a:rPr>
-              <a:t>Then take the short quiz to check the main ideas</a:t>
+              <a:t>Starting from D–E instead gives a cut of four</a:t>
             </a:r>
           </a:p>
           <a:p>
@@ -8294,7 +8540,1256 @@
                 </a:solidFill>
                 <a:latin typeface="Calibri"/>
               </a:rPr>
-              <a:t>Next comes Kernighan–Lin, which starts from your split and makes it better</a:t>
+              <a:t>So a tie rule more than doubled the cut</a:t>
+            </a:r>
+          </a:p>
+          <a:p>
+            <a:pPr lvl="0" marL="457200" indent="-228600">
+              <a:buFont typeface="Calibri"/>
+              <a:spcAft>
+                <a:spcPts val="1000"/>
+              </a:spcAft>
+              <a:buSzPct val="100000"/>
+              <a:buChar char="•"/>
+              <a:lnSpc>
+                <a:spcPts val="2200"/>
+              </a:lnSpc>
+            </a:pPr>
+            <a:r>
+              <a:rPr sz="2000" b="0">
+                <a:solidFill>
+                  <a:srgbClr val="333333"/>
+                </a:solidFill>
+                <a:latin typeface="Calibri"/>
+              </a:rPr>
+              <a:t>Grow from C also finds four</a:t>
+            </a:r>
+          </a:p>
+        </p:txBody>
+      </p:sp>
+      <p:pic>
+        <p:nvPicPr>
+          <p:cNvPr id="4" name="Picture 3" descr="tie-graph.png"/>
+          <p:cNvPicPr>
+            <a:picLocks noChangeAspect="1"/>
+          </p:cNvPicPr>
+          <p:nvPr/>
+        </p:nvPicPr>
+        <p:blipFill>
+          <a:blip r:embed="rId2"/>
+          <a:stretch>
+            <a:fillRect/>
+          </a:stretch>
+        </p:blipFill>
+        <p:spPr>
+          <a:xfrm>
+            <a:off x="6172200" y="1234440"/>
+            <a:ext cx="4007853" cy="4754879"/>
+          </a:xfrm>
+          <a:prstGeom prst="rect">
+            <a:avLst/>
+          </a:prstGeom>
+        </p:spPr>
+      </p:pic>
+      <p:sp>
+        <p:nvSpPr>
+          <p:cNvPr id="5" name="TextBox 4"/>
+          <p:cNvSpPr txBox="1"/>
+          <p:nvPr/>
+        </p:nvSpPr>
+        <p:spPr>
+          <a:xfrm>
+            <a:off x="548640" y="6355080"/>
+            <a:ext cx="11064240" cy="320040"/>
+          </a:xfrm>
+          <a:prstGeom prst="rect">
+            <a:avLst/>
+          </a:prstGeom>
+          <a:noFill/>
+        </p:spPr>
+        <p:txBody>
+          <a:bodyPr wrap="square">
+            <a:noAutofit/>
+          </a:bodyPr>
+          <a:lstStyle/>
+          <a:p>
+            <a:pPr algn="r">
+              <a:lnSpc>
+                <a:spcPts val="2200"/>
+              </a:lnSpc>
+              <a:defRPr sz="1000" b="0">
+                <a:solidFill>
+                  <a:srgbClr val="666666"/>
+                </a:solidFill>
+                <a:latin typeface="Calibri"/>
+              </a:defRPr>
+            </a:pPr>
+            <a:r>
+              <a:t>learn_partitioning — 03 initial bipartition</a:t>
+            </a:r>
+          </a:p>
+        </p:txBody>
+      </p:sp>
+    </p:spTree>
+  </p:cSld>
+  <p:clrMapOvr>
+    <a:masterClrMapping/>
+  </p:clrMapOvr>
+</p:sld>
+</file>
+
+<file path=ppt/slides/slide24.xml><?xml version="1.0" encoding="utf-8"?>
+<p:sld xmlns:a="http://schemas.openxmlformats.org/drawingml/2006/main" xmlns:p="http://schemas.openxmlformats.org/presentationml/2006/main" xmlns:r="http://schemas.openxmlformats.org/officeDocument/2006/relationships">
+  <p:cSld>
+    <p:spTree>
+      <p:nvGrpSpPr>
+        <p:cNvPr id="1" name=""/>
+        <p:cNvGrpSpPr/>
+        <p:nvPr/>
+      </p:nvGrpSpPr>
+      <p:grpSpPr/>
+      <p:sp>
+        <p:nvSpPr>
+          <p:cNvPr id="2" name="TextBox 1"/>
+          <p:cNvSpPr txBox="1"/>
+          <p:nvPr/>
+        </p:nvSpPr>
+        <p:spPr>
+          <a:xfrm>
+            <a:off x="548640" y="411480"/>
+            <a:ext cx="11064240" cy="777240"/>
+          </a:xfrm>
+          <a:prstGeom prst="rect">
+            <a:avLst/>
+          </a:prstGeom>
+          <a:noFill/>
+        </p:spPr>
+        <p:txBody>
+          <a:bodyPr wrap="square">
+            <a:noAutofit/>
+          </a:bodyPr>
+          <a:lstStyle/>
+          <a:p>
+            <a:pPr>
+              <a:lnSpc>
+                <a:spcPts val="2200"/>
+              </a:lnSpc>
+            </a:pPr>
+            <a:r>
+              <a:rPr sz="2800" b="1">
+                <a:solidFill>
+                  <a:srgbClr val="1A1A2E"/>
+                </a:solidFill>
+                <a:latin typeface="Calibri"/>
+              </a:rPr>
+              <a:t>Trap 3: the heaviest wire is not always inside</a:t>
+            </a:r>
+          </a:p>
+        </p:txBody>
+      </p:sp>
+      <p:sp>
+        <p:nvSpPr>
+          <p:cNvPr id="3" name="TextBox 2"/>
+          <p:cNvSpPr txBox="1"/>
+          <p:nvPr/>
+        </p:nvSpPr>
+        <p:spPr>
+          <a:xfrm>
+            <a:off x="548640" y="1234440"/>
+            <a:ext cx="5303520" cy="4754880"/>
+          </a:xfrm>
+          <a:prstGeom prst="rect">
+            <a:avLst/>
+          </a:prstGeom>
+          <a:noFill/>
+        </p:spPr>
+        <p:txBody>
+          <a:bodyPr wrap="square">
+            <a:noAutofit/>
+          </a:bodyPr>
+          <a:lstStyle/>
+          <a:p>
+            <a:pPr lvl="0" marL="457200" indent="-228600">
+              <a:buFont typeface="Calibri"/>
+              <a:spcAft>
+                <a:spcPts val="1000"/>
+              </a:spcAft>
+              <a:buSzPct val="100000"/>
+              <a:buChar char="•"/>
+              <a:lnSpc>
+                <a:spcPts val="2200"/>
+              </a:lnSpc>
+            </a:pPr>
+            <a:r>
+              <a:rPr sz="2000" b="0">
+                <a:solidFill>
+                  <a:srgbClr val="333333"/>
+                </a:solidFill>
+                <a:latin typeface="Calibri"/>
+              </a:rPr>
+              <a:t>Here are two triangles, joined by one bridge, C–D, with weight four</a:t>
+            </a:r>
+          </a:p>
+          <a:p>
+            <a:pPr lvl="0" marL="457200" indent="-228600">
+              <a:buFont typeface="Calibri"/>
+              <a:spcAft>
+                <a:spcPts val="1000"/>
+              </a:spcAft>
+              <a:buSzPct val="100000"/>
+              <a:buChar char="•"/>
+              <a:lnSpc>
+                <a:spcPts val="2200"/>
+              </a:lnSpc>
+            </a:pPr>
+            <a:r>
+              <a:rPr sz="2000" b="0">
+                <a:solidFill>
+                  <a:srgbClr val="333333"/>
+                </a:solidFill>
+                <a:latin typeface="Calibri"/>
+              </a:rPr>
+              <a:t>Every triangle edge weighs three</a:t>
+            </a:r>
+          </a:p>
+          <a:p>
+            <a:pPr lvl="0" marL="457200" indent="-228600">
+              <a:buFont typeface="Calibri"/>
+              <a:spcAft>
+                <a:spcPts val="1000"/>
+              </a:spcAft>
+              <a:buSzPct val="100000"/>
+              <a:buChar char="•"/>
+              <a:lnSpc>
+                <a:spcPts val="2200"/>
+              </a:lnSpc>
+            </a:pPr>
+            <a:r>
+              <a:rPr sz="2000" b="0">
+                <a:solidFill>
+                  <a:srgbClr val="333333"/>
+                </a:solidFill>
+                <a:latin typeface="Calibri"/>
+              </a:rPr>
+              <a:t>Greedy starts from the heaviest edge, which is the bridge itself</a:t>
+            </a:r>
+          </a:p>
+          <a:p>
+            <a:pPr lvl="0" marL="457200" indent="-228600">
+              <a:buFont typeface="Calibri"/>
+              <a:spcAft>
+                <a:spcPts val="1000"/>
+              </a:spcAft>
+              <a:buSzPct val="100000"/>
+              <a:buChar char="•"/>
+              <a:lnSpc>
+                <a:spcPts val="2200"/>
+              </a:lnSpc>
+            </a:pPr>
+            <a:r>
+              <a:rPr sz="2000" b="0">
+                <a:solidFill>
+                  <a:srgbClr val="333333"/>
+                </a:solidFill>
+                <a:latin typeface="Calibri"/>
+              </a:rPr>
+              <a:t>So C and D begin on the same side, and the cut ends at twelve</a:t>
+            </a:r>
+          </a:p>
+        </p:txBody>
+      </p:sp>
+      <p:pic>
+        <p:nvPicPr>
+          <p:cNvPr id="4" name="Picture 3" descr="bridge-graph-1.png"/>
+          <p:cNvPicPr>
+            <a:picLocks noChangeAspect="1"/>
+          </p:cNvPicPr>
+          <p:nvPr/>
+        </p:nvPicPr>
+        <p:blipFill>
+          <a:blip r:embed="rId2"/>
+          <a:stretch>
+            <a:fillRect/>
+          </a:stretch>
+        </p:blipFill>
+        <p:spPr>
+          <a:xfrm>
+            <a:off x="6172200" y="1234440"/>
+            <a:ext cx="4007853" cy="4754879"/>
+          </a:xfrm>
+          <a:prstGeom prst="rect">
+            <a:avLst/>
+          </a:prstGeom>
+        </p:spPr>
+      </p:pic>
+      <p:sp>
+        <p:nvSpPr>
+          <p:cNvPr id="5" name="TextBox 4"/>
+          <p:cNvSpPr txBox="1"/>
+          <p:nvPr/>
+        </p:nvSpPr>
+        <p:spPr>
+          <a:xfrm>
+            <a:off x="548640" y="6355080"/>
+            <a:ext cx="11064240" cy="320040"/>
+          </a:xfrm>
+          <a:prstGeom prst="rect">
+            <a:avLst/>
+          </a:prstGeom>
+          <a:noFill/>
+        </p:spPr>
+        <p:txBody>
+          <a:bodyPr wrap="square">
+            <a:noAutofit/>
+          </a:bodyPr>
+          <a:lstStyle/>
+          <a:p>
+            <a:pPr algn="r">
+              <a:lnSpc>
+                <a:spcPts val="2200"/>
+              </a:lnSpc>
+              <a:defRPr sz="1000" b="0">
+                <a:solidFill>
+                  <a:srgbClr val="666666"/>
+                </a:solidFill>
+                <a:latin typeface="Calibri"/>
+              </a:defRPr>
+            </a:pPr>
+            <a:r>
+              <a:t>learn_partitioning — 03 initial bipartition</a:t>
+            </a:r>
+          </a:p>
+        </p:txBody>
+      </p:sp>
+    </p:spTree>
+  </p:cSld>
+  <p:clrMapOvr>
+    <a:masterClrMapping/>
+  </p:clrMapOvr>
+</p:sld>
+</file>
+
+<file path=ppt/slides/slide25.xml><?xml version="1.0" encoding="utf-8"?>
+<p:sld xmlns:a="http://schemas.openxmlformats.org/drawingml/2006/main" xmlns:p="http://schemas.openxmlformats.org/presentationml/2006/main" xmlns:r="http://schemas.openxmlformats.org/officeDocument/2006/relationships">
+  <p:cSld>
+    <p:spTree>
+      <p:nvGrpSpPr>
+        <p:cNvPr id="1" name=""/>
+        <p:cNvGrpSpPr/>
+        <p:nvPr/>
+      </p:nvGrpSpPr>
+      <p:grpSpPr/>
+      <p:sp>
+        <p:nvSpPr>
+          <p:cNvPr id="2" name="TextBox 1"/>
+          <p:cNvSpPr txBox="1"/>
+          <p:nvPr/>
+        </p:nvSpPr>
+        <p:spPr>
+          <a:xfrm>
+            <a:off x="548640" y="411480"/>
+            <a:ext cx="11064240" cy="777240"/>
+          </a:xfrm>
+          <a:prstGeom prst="rect">
+            <a:avLst/>
+          </a:prstGeom>
+          <a:noFill/>
+        </p:spPr>
+        <p:txBody>
+          <a:bodyPr wrap="square">
+            <a:noAutofit/>
+          </a:bodyPr>
+          <a:lstStyle/>
+          <a:p>
+            <a:pPr>
+              <a:lnSpc>
+                <a:spcPts val="2200"/>
+              </a:lnSpc>
+            </a:pPr>
+            <a:r>
+              <a:rPr sz="2800" b="1">
+                <a:solidFill>
+                  <a:srgbClr val="1A1A2E"/>
+                </a:solidFill>
+                <a:latin typeface="Calibri"/>
+              </a:rPr>
+              <a:t>Trap 3: grow keeps the triangles</a:t>
+            </a:r>
+          </a:p>
+        </p:txBody>
+      </p:sp>
+      <p:sp>
+        <p:nvSpPr>
+          <p:cNvPr id="3" name="TextBox 2"/>
+          <p:cNvSpPr txBox="1"/>
+          <p:nvPr/>
+        </p:nvSpPr>
+        <p:spPr>
+          <a:xfrm>
+            <a:off x="548640" y="1234440"/>
+            <a:ext cx="5303520" cy="4754880"/>
+          </a:xfrm>
+          <a:prstGeom prst="rect">
+            <a:avLst/>
+          </a:prstGeom>
+          <a:noFill/>
+        </p:spPr>
+        <p:txBody>
+          <a:bodyPr wrap="square">
+            <a:noAutofit/>
+          </a:bodyPr>
+          <a:lstStyle/>
+          <a:p>
+            <a:pPr lvl="0" marL="457200" indent="-228600">
+              <a:buFont typeface="Calibri"/>
+              <a:spcAft>
+                <a:spcPts val="1000"/>
+              </a:spcAft>
+              <a:buSzPct val="100000"/>
+              <a:buChar char="•"/>
+              <a:lnSpc>
+                <a:spcPts val="2200"/>
+              </a:lnSpc>
+            </a:pPr>
+            <a:r>
+              <a:rPr sz="2000" b="0">
+                <a:solidFill>
+                  <a:srgbClr val="333333"/>
+                </a:solidFill>
+                <a:latin typeface="Calibri"/>
+              </a:rPr>
+              <a:t>Grow from A keeps its triangle together, and cuts only the bridge: four</a:t>
+            </a:r>
+          </a:p>
+          <a:p>
+            <a:pPr lvl="0" marL="457200" indent="-228600">
+              <a:buFont typeface="Calibri"/>
+              <a:spcAft>
+                <a:spcPts val="1000"/>
+              </a:spcAft>
+              <a:buSzPct val="100000"/>
+              <a:buChar char="•"/>
+              <a:lnSpc>
+                <a:spcPts val="2200"/>
+              </a:lnSpc>
+            </a:pPr>
+            <a:r>
+              <a:rPr sz="2000" b="0">
+                <a:solidFill>
+                  <a:srgbClr val="333333"/>
+                </a:solidFill>
+                <a:latin typeface="Calibri"/>
+              </a:rPr>
+              <a:t>Pause and guess: is grow always better than greedy?</a:t>
+            </a:r>
+          </a:p>
+        </p:txBody>
+      </p:sp>
+      <p:pic>
+        <p:nvPicPr>
+          <p:cNvPr id="4" name="Picture 3" descr="bridge-graph.png"/>
+          <p:cNvPicPr>
+            <a:picLocks noChangeAspect="1"/>
+          </p:cNvPicPr>
+          <p:nvPr/>
+        </p:nvPicPr>
+        <p:blipFill>
+          <a:blip r:embed="rId2"/>
+          <a:stretch>
+            <a:fillRect/>
+          </a:stretch>
+        </p:blipFill>
+        <p:spPr>
+          <a:xfrm>
+            <a:off x="6172200" y="1234440"/>
+            <a:ext cx="4007853" cy="4754879"/>
+          </a:xfrm>
+          <a:prstGeom prst="rect">
+            <a:avLst/>
+          </a:prstGeom>
+        </p:spPr>
+      </p:pic>
+      <p:sp>
+        <p:nvSpPr>
+          <p:cNvPr id="5" name="TextBox 4"/>
+          <p:cNvSpPr txBox="1"/>
+          <p:nvPr/>
+        </p:nvSpPr>
+        <p:spPr>
+          <a:xfrm>
+            <a:off x="548640" y="6355080"/>
+            <a:ext cx="11064240" cy="320040"/>
+          </a:xfrm>
+          <a:prstGeom prst="rect">
+            <a:avLst/>
+          </a:prstGeom>
+          <a:noFill/>
+        </p:spPr>
+        <p:txBody>
+          <a:bodyPr wrap="square">
+            <a:noAutofit/>
+          </a:bodyPr>
+          <a:lstStyle/>
+          <a:p>
+            <a:pPr algn="r">
+              <a:lnSpc>
+                <a:spcPts val="2200"/>
+              </a:lnSpc>
+              <a:defRPr sz="1000" b="0">
+                <a:solidFill>
+                  <a:srgbClr val="666666"/>
+                </a:solidFill>
+                <a:latin typeface="Calibri"/>
+              </a:defRPr>
+            </a:pPr>
+            <a:r>
+              <a:t>learn_partitioning — 03 initial bipartition</a:t>
+            </a:r>
+          </a:p>
+        </p:txBody>
+      </p:sp>
+    </p:spTree>
+  </p:cSld>
+  <p:clrMapOvr>
+    <a:masterClrMapping/>
+  </p:clrMapOvr>
+</p:sld>
+</file>
+
+<file path=ppt/slides/slide26.xml><?xml version="1.0" encoding="utf-8"?>
+<p:sld xmlns:a="http://schemas.openxmlformats.org/drawingml/2006/main" xmlns:p="http://schemas.openxmlformats.org/presentationml/2006/main" xmlns:r="http://schemas.openxmlformats.org/officeDocument/2006/relationships">
+  <p:cSld>
+    <p:spTree>
+      <p:nvGrpSpPr>
+        <p:cNvPr id="1" name=""/>
+        <p:cNvGrpSpPr/>
+        <p:nvPr/>
+      </p:nvGrpSpPr>
+      <p:grpSpPr/>
+      <p:sp>
+        <p:nvSpPr>
+          <p:cNvPr id="2" name="TextBox 1"/>
+          <p:cNvSpPr txBox="1"/>
+          <p:nvPr/>
+        </p:nvSpPr>
+        <p:spPr>
+          <a:xfrm>
+            <a:off x="548640" y="411480"/>
+            <a:ext cx="11064240" cy="777240"/>
+          </a:xfrm>
+          <a:prstGeom prst="rect">
+            <a:avLst/>
+          </a:prstGeom>
+          <a:noFill/>
+        </p:spPr>
+        <p:txBody>
+          <a:bodyPr wrap="square">
+            <a:noAutofit/>
+          </a:bodyPr>
+          <a:lstStyle/>
+          <a:p>
+            <a:pPr>
+              <a:lnSpc>
+                <a:spcPts val="2200"/>
+              </a:lnSpc>
+            </a:pPr>
+            <a:r>
+              <a:rPr sz="2800" b="1">
+                <a:solidFill>
+                  <a:srgbClr val="1A1A2E"/>
+                </a:solidFill>
+                <a:latin typeface="Calibri"/>
+              </a:rPr>
+              <a:t>Browser lab track</a:t>
+            </a:r>
+          </a:p>
+        </p:txBody>
+      </p:sp>
+      <p:pic>
+        <p:nvPicPr>
+          <p:cNvPr id="3" name="Picture 2" descr="lab-starter.png"/>
+          <p:cNvPicPr>
+            <a:picLocks noChangeAspect="1"/>
+          </p:cNvPicPr>
+          <p:nvPr/>
+        </p:nvPicPr>
+        <p:blipFill>
+          <a:blip r:embed="rId2"/>
+          <a:stretch>
+            <a:fillRect/>
+          </a:stretch>
+        </p:blipFill>
+        <p:spPr>
+          <a:xfrm>
+            <a:off x="548640" y="1143000"/>
+            <a:ext cx="5418666" cy="4571999"/>
+          </a:xfrm>
+          <a:prstGeom prst="rect">
+            <a:avLst/>
+          </a:prstGeom>
+        </p:spPr>
+      </p:pic>
+      <p:sp>
+        <p:nvSpPr>
+          <p:cNvPr id="4" name="TextBox 3"/>
+          <p:cNvSpPr txBox="1"/>
+          <p:nvPr/>
+        </p:nvSpPr>
+        <p:spPr>
+          <a:xfrm>
+            <a:off x="548640" y="5897880"/>
+            <a:ext cx="11064240" cy="411480"/>
+          </a:xfrm>
+          <a:prstGeom prst="rect">
+            <a:avLst/>
+          </a:prstGeom>
+          <a:noFill/>
+        </p:spPr>
+        <p:txBody>
+          <a:bodyPr wrap="square">
+            <a:noAutofit/>
+          </a:bodyPr>
+          <a:lstStyle/>
+          <a:p>
+            <a:pPr>
+              <a:lnSpc>
+                <a:spcPts val="2200"/>
+              </a:lnSpc>
+            </a:pPr>
+            <a:r>
+              <a:rPr sz="1200" b="0">
+                <a:solidFill>
+                  <a:srgbClr val="333333"/>
+                </a:solidFill>
+                <a:latin typeface="Calibri"/>
+              </a:rPr>
+              <a:t>Browser lab starter</a:t>
+            </a:r>
+          </a:p>
+        </p:txBody>
+      </p:sp>
+      <p:sp>
+        <p:nvSpPr>
+          <p:cNvPr id="5" name="TextBox 4"/>
+          <p:cNvSpPr txBox="1"/>
+          <p:nvPr/>
+        </p:nvSpPr>
+        <p:spPr>
+          <a:xfrm>
+            <a:off x="548640" y="6355080"/>
+            <a:ext cx="11064240" cy="320040"/>
+          </a:xfrm>
+          <a:prstGeom prst="rect">
+            <a:avLst/>
+          </a:prstGeom>
+          <a:noFill/>
+        </p:spPr>
+        <p:txBody>
+          <a:bodyPr wrap="square">
+            <a:noAutofit/>
+          </a:bodyPr>
+          <a:lstStyle/>
+          <a:p>
+            <a:pPr algn="r">
+              <a:lnSpc>
+                <a:spcPts val="2200"/>
+              </a:lnSpc>
+              <a:defRPr sz="1000" b="0">
+                <a:solidFill>
+                  <a:srgbClr val="666666"/>
+                </a:solidFill>
+                <a:latin typeface="Calibri"/>
+              </a:defRPr>
+            </a:pPr>
+            <a:r>
+              <a:t>learn_partitioning — 03 initial bipartition</a:t>
+            </a:r>
+          </a:p>
+        </p:txBody>
+      </p:sp>
+    </p:spTree>
+  </p:cSld>
+  <p:clrMapOvr>
+    <a:masterClrMapping/>
+  </p:clrMapOvr>
+</p:sld>
+</file>
+
+<file path=ppt/slides/slide27.xml><?xml version="1.0" encoding="utf-8"?>
+<p:sld xmlns:a="http://schemas.openxmlformats.org/drawingml/2006/main" xmlns:p="http://schemas.openxmlformats.org/presentationml/2006/main" xmlns:r="http://schemas.openxmlformats.org/officeDocument/2006/relationships">
+  <p:cSld>
+    <p:spTree>
+      <p:nvGrpSpPr>
+        <p:cNvPr id="1" name=""/>
+        <p:cNvGrpSpPr/>
+        <p:nvPr/>
+      </p:nvGrpSpPr>
+      <p:grpSpPr/>
+      <p:sp>
+        <p:nvSpPr>
+          <p:cNvPr id="2" name="TextBox 1"/>
+          <p:cNvSpPr txBox="1"/>
+          <p:nvPr/>
+        </p:nvSpPr>
+        <p:spPr>
+          <a:xfrm>
+            <a:off x="548640" y="411480"/>
+            <a:ext cx="11064240" cy="777240"/>
+          </a:xfrm>
+          <a:prstGeom prst="rect">
+            <a:avLst/>
+          </a:prstGeom>
+          <a:noFill/>
+        </p:spPr>
+        <p:txBody>
+          <a:bodyPr wrap="square">
+            <a:noAutofit/>
+          </a:bodyPr>
+          <a:lstStyle/>
+          <a:p>
+            <a:pPr>
+              <a:lnSpc>
+                <a:spcPts val="2200"/>
+              </a:lnSpc>
+            </a:pPr>
+            <a:r>
+              <a:rPr sz="2800" b="1">
+                <a:solidFill>
+                  <a:srgbClr val="1A1A2E"/>
+                </a:solidFill>
+                <a:latin typeface="Calibri"/>
+              </a:rPr>
+              <a:t>Implement track</a:t>
+            </a:r>
+          </a:p>
+        </p:txBody>
+      </p:sp>
+      <p:pic>
+        <p:nvPicPr>
+          <p:cNvPr id="3" name="Picture 2" descr="real-shell.png"/>
+          <p:cNvPicPr>
+            <a:picLocks noChangeAspect="1"/>
+          </p:cNvPicPr>
+          <p:nvPr/>
+        </p:nvPicPr>
+        <p:blipFill>
+          <a:blip r:embed="rId2"/>
+          <a:stretch>
+            <a:fillRect/>
+          </a:stretch>
+        </p:blipFill>
+        <p:spPr>
+          <a:xfrm>
+            <a:off x="548640" y="1143000"/>
+            <a:ext cx="9160625" cy="4572000"/>
+          </a:xfrm>
+          <a:prstGeom prst="rect">
+            <a:avLst/>
+          </a:prstGeom>
+        </p:spPr>
+      </p:pic>
+      <p:sp>
+        <p:nvSpPr>
+          <p:cNvPr id="4" name="TextBox 3"/>
+          <p:cNvSpPr txBox="1"/>
+          <p:nvPr/>
+        </p:nvSpPr>
+        <p:spPr>
+          <a:xfrm>
+            <a:off x="548640" y="5897880"/>
+            <a:ext cx="11064240" cy="411480"/>
+          </a:xfrm>
+          <a:prstGeom prst="rect">
+            <a:avLst/>
+          </a:prstGeom>
+          <a:noFill/>
+        </p:spPr>
+        <p:txBody>
+          <a:bodyPr wrap="square">
+            <a:noAutofit/>
+          </a:bodyPr>
+          <a:lstStyle/>
+          <a:p>
+            <a:pPr>
+              <a:lnSpc>
+                <a:spcPts val="2200"/>
+              </a:lnSpc>
+            </a:pPr>
+            <a:r>
+              <a:rPr sz="1200" b="0">
+                <a:solidFill>
+                  <a:srgbClr val="333333"/>
+                </a:solidFill>
+                <a:latin typeface="Calibri"/>
+              </a:rPr>
+              <a:t>Real shell session</a:t>
+            </a:r>
+          </a:p>
+        </p:txBody>
+      </p:sp>
+      <p:sp>
+        <p:nvSpPr>
+          <p:cNvPr id="5" name="TextBox 4"/>
+          <p:cNvSpPr txBox="1"/>
+          <p:nvPr/>
+        </p:nvSpPr>
+        <p:spPr>
+          <a:xfrm>
+            <a:off x="548640" y="6355080"/>
+            <a:ext cx="11064240" cy="320040"/>
+          </a:xfrm>
+          <a:prstGeom prst="rect">
+            <a:avLst/>
+          </a:prstGeom>
+          <a:noFill/>
+        </p:spPr>
+        <p:txBody>
+          <a:bodyPr wrap="square">
+            <a:noAutofit/>
+          </a:bodyPr>
+          <a:lstStyle/>
+          <a:p>
+            <a:pPr algn="r">
+              <a:lnSpc>
+                <a:spcPts val="2200"/>
+              </a:lnSpc>
+              <a:defRPr sz="1000" b="0">
+                <a:solidFill>
+                  <a:srgbClr val="666666"/>
+                </a:solidFill>
+                <a:latin typeface="Calibri"/>
+              </a:defRPr>
+            </a:pPr>
+            <a:r>
+              <a:t>learn_partitioning — 03 initial bipartition</a:t>
+            </a:r>
+          </a:p>
+        </p:txBody>
+      </p:sp>
+    </p:spTree>
+  </p:cSld>
+  <p:clrMapOvr>
+    <a:masterClrMapping/>
+  </p:clrMapOvr>
+</p:sld>
+</file>
+
+<file path=ppt/slides/slide28.xml><?xml version="1.0" encoding="utf-8"?>
+<p:sld xmlns:a="http://schemas.openxmlformats.org/drawingml/2006/main" xmlns:p="http://schemas.openxmlformats.org/presentationml/2006/main" xmlns:r="http://schemas.openxmlformats.org/officeDocument/2006/relationships">
+  <p:cSld>
+    <p:spTree>
+      <p:nvGrpSpPr>
+        <p:cNvPr id="1" name=""/>
+        <p:cNvGrpSpPr/>
+        <p:nvPr/>
+      </p:nvGrpSpPr>
+      <p:grpSpPr/>
+      <p:sp>
+        <p:nvSpPr>
+          <p:cNvPr id="2" name="TextBox 1"/>
+          <p:cNvSpPr txBox="1"/>
+          <p:nvPr/>
+        </p:nvSpPr>
+        <p:spPr>
+          <a:xfrm>
+            <a:off x="548640" y="411480"/>
+            <a:ext cx="11064240" cy="777240"/>
+          </a:xfrm>
+          <a:prstGeom prst="rect">
+            <a:avLst/>
+          </a:prstGeom>
+          <a:noFill/>
+        </p:spPr>
+        <p:txBody>
+          <a:bodyPr wrap="square">
+            <a:noAutofit/>
+          </a:bodyPr>
+          <a:lstStyle/>
+          <a:p>
+            <a:pPr>
+              <a:lnSpc>
+                <a:spcPts val="2200"/>
+              </a:lnSpc>
+            </a:pPr>
+            <a:r>
+              <a:rPr sz="2800" b="1">
+                <a:solidFill>
+                  <a:srgbClr val="1A1A2E"/>
+                </a:solidFill>
+                <a:latin typeface="Calibri"/>
+              </a:rPr>
+              <a:t>Implement track — try these</a:t>
+            </a:r>
+          </a:p>
+        </p:txBody>
+      </p:sp>
+      <p:sp>
+        <p:nvSpPr>
+          <p:cNvPr id="3" name="TextBox 2"/>
+          <p:cNvSpPr txBox="1"/>
+          <p:nvPr/>
+        </p:nvSpPr>
+        <p:spPr>
+          <a:xfrm>
+            <a:off x="548640" y="1143000"/>
+            <a:ext cx="11064240" cy="5029200"/>
+          </a:xfrm>
+          <a:prstGeom prst="rect">
+            <a:avLst/>
+          </a:prstGeom>
+          <a:solidFill>
+            <a:srgbClr val="F4F4F4"/>
+          </a:solidFill>
+        </p:spPr>
+        <p:txBody>
+          <a:bodyPr wrap="square">
+            <a:noAutofit/>
+          </a:bodyPr>
+          <a:lstStyle/>
+          <a:p>
+            <a:pPr>
+              <a:lnSpc>
+                <a:spcPts val="2200"/>
+              </a:lnSpc>
+              <a:spcAft>
+                <a:spcPts val="400"/>
+              </a:spcAft>
+            </a:pPr>
+            <a:r>
+              <a:rPr sz="2000" b="0">
+                <a:solidFill>
+                  <a:srgbClr val="333333"/>
+                </a:solidFill>
+                <a:latin typeface="Consolas"/>
+              </a:rPr>
+              <a:t># print every correct answer</a:t>
+            </a:r>
+          </a:p>
+          <a:p>
+            <a:pPr>
+              <a:lnSpc>
+                <a:spcPts val="2200"/>
+              </a:lnSpc>
+              <a:spcAft>
+                <a:spcPts val="400"/>
+              </a:spcAft>
+            </a:pPr>
+            <a:r>
+              <a:rPr sz="2000" b="0">
+                <a:solidFill>
+                  <a:srgbClr val="333333"/>
+                </a:solidFill>
+                <a:latin typeface="Consolas"/>
+              </a:rPr>
+              <a:t>python3 examples/initial_bipartition_check.py --show</a:t>
+            </a:r>
+          </a:p>
+          <a:p>
+            <a:pPr>
+              <a:lnSpc>
+                <a:spcPts val="2200"/>
+              </a:lnSpc>
+              <a:spcAft>
+                <a:spcPts val="400"/>
+              </a:spcAft>
+            </a:pPr>
+            <a:r>
+              <a:rPr sz="2000" b="0">
+                <a:solidFill>
+                  <a:srgbClr val="333333"/>
+                </a:solidFill>
+                <a:latin typeface="Consolas"/>
+              </a:rPr>
+              <a:t/>
+            </a:r>
+          </a:p>
+          <a:p>
+            <a:pPr>
+              <a:lnSpc>
+                <a:spcPts val="2200"/>
+              </a:lnSpc>
+              <a:spcAft>
+                <a:spcPts val="400"/>
+              </a:spcAft>
+            </a:pPr>
+            <a:r>
+              <a:rPr sz="2000" b="0">
+                <a:solidFill>
+                  <a:srgbClr val="333333"/>
+                </a:solidFill>
+                <a:latin typeface="Consolas"/>
+              </a:rPr>
+              <a:t># check your own functions</a:t>
+            </a:r>
+          </a:p>
+          <a:p>
+            <a:pPr>
+              <a:lnSpc>
+                <a:spcPts val="2200"/>
+              </a:lnSpc>
+              <a:spcAft>
+                <a:spcPts val="400"/>
+              </a:spcAft>
+            </a:pPr>
+            <a:r>
+              <a:rPr sz="2000" b="0">
+                <a:solidFill>
+                  <a:srgbClr val="333333"/>
+                </a:solidFill>
+                <a:latin typeface="Consolas"/>
+              </a:rPr>
+              <a:t>python3 examples/initial_bipartition_check.py --impl my_init.py</a:t>
+            </a:r>
+          </a:p>
+        </p:txBody>
+      </p:sp>
+      <p:sp>
+        <p:nvSpPr>
+          <p:cNvPr id="4" name="TextBox 3"/>
+          <p:cNvSpPr txBox="1"/>
+          <p:nvPr/>
+        </p:nvSpPr>
+        <p:spPr>
+          <a:xfrm>
+            <a:off x="548640" y="6355080"/>
+            <a:ext cx="11064240" cy="320040"/>
+          </a:xfrm>
+          <a:prstGeom prst="rect">
+            <a:avLst/>
+          </a:prstGeom>
+          <a:noFill/>
+        </p:spPr>
+        <p:txBody>
+          <a:bodyPr wrap="square">
+            <a:noAutofit/>
+          </a:bodyPr>
+          <a:lstStyle/>
+          <a:p>
+            <a:pPr algn="r">
+              <a:lnSpc>
+                <a:spcPts val="2200"/>
+              </a:lnSpc>
+              <a:defRPr sz="1000" b="0">
+                <a:solidFill>
+                  <a:srgbClr val="666666"/>
+                </a:solidFill>
+                <a:latin typeface="Calibri"/>
+              </a:defRPr>
+            </a:pPr>
+            <a:r>
+              <a:t>learn_partitioning — 03 initial bipartition</a:t>
+            </a:r>
+          </a:p>
+        </p:txBody>
+      </p:sp>
+    </p:spTree>
+  </p:cSld>
+  <p:clrMapOvr>
+    <a:masterClrMapping/>
+  </p:clrMapOvr>
+</p:sld>
+</file>
+
+<file path=ppt/slides/slide29.xml><?xml version="1.0" encoding="utf-8"?>
+<p:sld xmlns:a="http://schemas.openxmlformats.org/drawingml/2006/main" xmlns:p="http://schemas.openxmlformats.org/presentationml/2006/main" xmlns:r="http://schemas.openxmlformats.org/officeDocument/2006/relationships">
+  <p:cSld>
+    <p:spTree>
+      <p:nvGrpSpPr>
+        <p:cNvPr id="1" name=""/>
+        <p:cNvGrpSpPr/>
+        <p:nvPr/>
+      </p:nvGrpSpPr>
+      <p:grpSpPr/>
+      <p:sp>
+        <p:nvSpPr>
+          <p:cNvPr id="2" name="TextBox 1"/>
+          <p:cNvSpPr txBox="1"/>
+          <p:nvPr/>
+        </p:nvSpPr>
+        <p:spPr>
+          <a:xfrm>
+            <a:off x="548640" y="411480"/>
+            <a:ext cx="11064240" cy="777240"/>
+          </a:xfrm>
+          <a:prstGeom prst="rect">
+            <a:avLst/>
+          </a:prstGeom>
+          <a:noFill/>
+        </p:spPr>
+        <p:txBody>
+          <a:bodyPr wrap="square">
+            <a:noAutofit/>
+          </a:bodyPr>
+          <a:lstStyle/>
+          <a:p>
+            <a:pPr>
+              <a:lnSpc>
+                <a:spcPts val="2200"/>
+              </a:lnSpc>
+            </a:pPr>
+            <a:r>
+              <a:rPr sz="2800" b="1">
+                <a:solidFill>
+                  <a:srgbClr val="1A1A2E"/>
+                </a:solidFill>
+                <a:latin typeface="Calibri"/>
+              </a:rPr>
+              <a:t>Remember</a:t>
+            </a:r>
+          </a:p>
+        </p:txBody>
+      </p:sp>
+      <p:sp>
+        <p:nvSpPr>
+          <p:cNvPr id="3" name="TextBox 2"/>
+          <p:cNvSpPr txBox="1"/>
+          <p:nvPr/>
+        </p:nvSpPr>
+        <p:spPr>
+          <a:xfrm>
+            <a:off x="548640" y="1234440"/>
+            <a:ext cx="11064240" cy="4937760"/>
+          </a:xfrm>
+          <a:prstGeom prst="rect">
+            <a:avLst/>
+          </a:prstGeom>
+          <a:noFill/>
+        </p:spPr>
+        <p:txBody>
+          <a:bodyPr wrap="square">
+            <a:noAutofit/>
+          </a:bodyPr>
+          <a:lstStyle/>
+          <a:p>
+            <a:pPr lvl="0" marL="457200" indent="-228600">
+              <a:buFont typeface="Calibri"/>
+              <a:spcAft>
+                <a:spcPts val="1000"/>
+              </a:spcAft>
+              <a:buSzPct val="100000"/>
+              <a:buChar char="•"/>
+              <a:lnSpc>
+                <a:spcPts val="2200"/>
+              </a:lnSpc>
+            </a:pPr>
+            <a:r>
+              <a:rPr sz="2000" b="0">
+                <a:solidFill>
+                  <a:srgbClr val="333333"/>
+                </a:solidFill>
+                <a:latin typeface="Calibri"/>
+              </a:rPr>
+              <a:t>Random is fast, but it depends on luck</a:t>
+            </a:r>
+          </a:p>
+          <a:p>
+            <a:pPr lvl="0" marL="457200" indent="-228600">
+              <a:buFont typeface="Calibri"/>
+              <a:spcAft>
+                <a:spcPts val="1000"/>
+              </a:spcAft>
+              <a:buSzPct val="100000"/>
+              <a:buChar char="•"/>
+              <a:lnSpc>
+                <a:spcPts val="2200"/>
+              </a:lnSpc>
+            </a:pPr>
+            <a:r>
+              <a:rPr sz="2000" b="0">
+                <a:solidFill>
+                  <a:srgbClr val="333333"/>
+                </a:solidFill>
+                <a:latin typeface="Calibri"/>
+              </a:rPr>
+              <a:t>Greedy keeps heavy edges inside, but ties and bridges can fool it</a:t>
+            </a:r>
+          </a:p>
+          <a:p>
+            <a:pPr lvl="0" marL="457200" indent="-228600">
+              <a:buFont typeface="Calibri"/>
+              <a:spcAft>
+                <a:spcPts val="1000"/>
+              </a:spcAft>
+              <a:buSzPct val="100000"/>
+              <a:buChar char="•"/>
+              <a:lnSpc>
+                <a:spcPts val="2200"/>
+              </a:lnSpc>
+            </a:pPr>
+            <a:r>
+              <a:rPr sz="2000" b="0">
+                <a:solidFill>
+                  <a:srgbClr val="333333"/>
+                </a:solidFill>
+                <a:latin typeface="Calibri"/>
+              </a:rPr>
+              <a:t>Grow depends on its start node</a:t>
+            </a:r>
+          </a:p>
+          <a:p>
+            <a:pPr lvl="0" marL="457200" indent="-228600">
+              <a:buFont typeface="Calibri"/>
+              <a:spcAft>
+                <a:spcPts val="1000"/>
+              </a:spcAft>
+              <a:buSzPct val="100000"/>
+              <a:buChar char="•"/>
+              <a:lnSpc>
+                <a:spcPts val="2200"/>
+              </a:lnSpc>
+            </a:pPr>
+            <a:r>
+              <a:rPr sz="2000" b="0">
+                <a:solidFill>
+                  <a:srgbClr val="333333"/>
+                </a:solidFill>
+                <a:latin typeface="Calibri"/>
+              </a:rPr>
+              <a:t>Report the balance with every cut, and never let a side pass its limit</a:t>
+            </a:r>
+          </a:p>
+          <a:p>
+            <a:pPr lvl="0" marL="457200" indent="-228600">
+              <a:buFont typeface="Calibri"/>
+              <a:spcAft>
+                <a:spcPts val="1000"/>
+              </a:spcAft>
+              <a:buSzPct val="100000"/>
+              <a:buChar char="•"/>
+              <a:lnSpc>
+                <a:spcPts val="2200"/>
+              </a:lnSpc>
+            </a:pPr>
+            <a:r>
+              <a:rPr sz="2000" b="0">
+                <a:solidFill>
+                  <a:srgbClr val="333333"/>
+                </a:solidFill>
+                <a:latin typeface="Calibri"/>
+              </a:rPr>
+              <a:t>Break ties by name, not by the order of the input file</a:t>
+            </a:r>
+          </a:p>
+          <a:p>
+            <a:pPr lvl="0" marL="457200" indent="-228600">
+              <a:buFont typeface="Calibri"/>
+              <a:spcAft>
+                <a:spcPts val="1000"/>
+              </a:spcAft>
+              <a:buSzPct val="100000"/>
+              <a:buChar char="•"/>
+              <a:lnSpc>
+                <a:spcPts val="2200"/>
+              </a:lnSpc>
+            </a:pPr>
+            <a:r>
+              <a:rPr sz="2000" b="0">
+                <a:solidFill>
+                  <a:srgbClr val="333333"/>
+                </a:solidFill>
+                <a:latin typeface="Calibri"/>
+              </a:rPr>
+              <a:t>So try several starts, keep the best legal one</a:t>
             </a:r>
           </a:p>
         </p:txBody>
@@ -8390,7 +9885,7 @@
                 </a:solidFill>
                 <a:latin typeface="Calibri"/>
               </a:rPr>
-              <a:t>Two numbers: cut and balance</a:t>
+              <a:t>Cells become dots, wires become lines</a:t>
             </a:r>
           </a:p>
         </p:txBody>
@@ -8435,7 +9930,7 @@
                 </a:solidFill>
                 <a:latin typeface="Calibri"/>
               </a:rPr>
-              <a:t>Splitting a chip into two sides is called a bipartition</a:t>
+              <a:t>We draw each cell as a dot, called a node</a:t>
             </a:r>
           </a:p>
           <a:p>
@@ -8457,7 +9952,7 @@
                 </a:solidFill>
                 <a:latin typeface="Calibri"/>
               </a:rPr>
-              <a:t>Edges that cross between the two sides are cut, and they are drawn in red</a:t>
+              <a:t>A line between two nodes is an edge</a:t>
             </a:r>
           </a:p>
           <a:p>
@@ -8479,7 +9974,7 @@
                 </a:solidFill>
                 <a:latin typeface="Calibri"/>
               </a:rPr>
-              <a:t>The cutsize adds up their weights: here, two plus one makes three</a:t>
+              <a:t>Its number, the weight, counts the wires between the pair</a:t>
             </a:r>
           </a:p>
           <a:p>
@@ -8501,58 +9996,14 @@
                 </a:solidFill>
                 <a:latin typeface="Calibri"/>
               </a:rPr>
-              <a:t>Putting every cell on one side gives a cut of zero, but that split is useless</a:t>
-            </a:r>
-          </a:p>
-          <a:p>
-            <a:pPr lvl="0" marL="457200" indent="-228600">
-              <a:buFont typeface="Calibri"/>
-              <a:spcAft>
-                <a:spcPts val="1000"/>
-              </a:spcAft>
-              <a:buSzPct val="100000"/>
-              <a:buChar char="•"/>
-              <a:lnSpc>
-                <a:spcPts val="2200"/>
-              </a:lnSpc>
-            </a:pPr>
-            <a:r>
-              <a:rPr sz="2000" b="0">
-                <a:solidFill>
-                  <a:srgbClr val="333333"/>
-                </a:solidFill>
-                <a:latin typeface="Calibri"/>
-              </a:rPr>
-              <a:t>So we also check balance: how many cells each side holds</a:t>
-            </a:r>
-          </a:p>
-          <a:p>
-            <a:pPr lvl="0" marL="457200" indent="-228600">
-              <a:buFont typeface="Calibri"/>
-              <a:spcAft>
-                <a:spcPts val="1000"/>
-              </a:spcAft>
-              <a:buSzPct val="100000"/>
-              <a:buChar char="•"/>
-              <a:lnSpc>
-                <a:spcPts val="2200"/>
-              </a:lnSpc>
-            </a:pPr>
-            <a:r>
-              <a:rPr sz="2000" b="0">
-                <a:solidFill>
-                  <a:srgbClr val="333333"/>
-                </a:solidFill>
-                <a:latin typeface="Calibri"/>
-              </a:rPr>
-              <a:t>A split is legal when no side holds more than three of the five cells</a:t>
+              <a:t>A–B and D–E are the heaviest, with five wires each</a:t>
             </a:r>
           </a:p>
         </p:txBody>
       </p:sp>
       <p:pic>
         <p:nvPicPr>
-          <p:cNvPr id="4" name="Picture 3" descr="cut-and-balance.png"/>
+          <p:cNvPr id="4" name="Picture 3" descr="chip-to-graph.png"/>
           <p:cNvPicPr>
             <a:picLocks noChangeAspect="1"/>
           </p:cNvPicPr>
@@ -8567,7 +10018,7 @@
         <p:spPr>
           <a:xfrm>
             <a:off x="6172200" y="1234440"/>
-            <a:ext cx="4007853" cy="4754879"/>
+            <a:ext cx="3978092" cy="4754879"/>
           </a:xfrm>
           <a:prstGeom prst="rect">
             <a:avLst/>
@@ -8577,6 +10028,235 @@
       <p:sp>
         <p:nvSpPr>
           <p:cNvPr id="5" name="TextBox 4"/>
+          <p:cNvSpPr txBox="1"/>
+          <p:nvPr/>
+        </p:nvSpPr>
+        <p:spPr>
+          <a:xfrm>
+            <a:off x="548640" y="6355080"/>
+            <a:ext cx="11064240" cy="320040"/>
+          </a:xfrm>
+          <a:prstGeom prst="rect">
+            <a:avLst/>
+          </a:prstGeom>
+          <a:noFill/>
+        </p:spPr>
+        <p:txBody>
+          <a:bodyPr wrap="square">
+            <a:noAutofit/>
+          </a:bodyPr>
+          <a:lstStyle/>
+          <a:p>
+            <a:pPr algn="r">
+              <a:lnSpc>
+                <a:spcPts val="2200"/>
+              </a:lnSpc>
+              <a:defRPr sz="1000" b="0">
+                <a:solidFill>
+                  <a:srgbClr val="666666"/>
+                </a:solidFill>
+                <a:latin typeface="Calibri"/>
+              </a:defRPr>
+            </a:pPr>
+            <a:r>
+              <a:t>learn_partitioning — 03 initial bipartition</a:t>
+            </a:r>
+          </a:p>
+        </p:txBody>
+      </p:sp>
+    </p:spTree>
+  </p:cSld>
+  <p:clrMapOvr>
+    <a:masterClrMapping/>
+  </p:clrMapOvr>
+</p:sld>
+</file>
+
+<file path=ppt/slides/slide30.xml><?xml version="1.0" encoding="utf-8"?>
+<p:sld xmlns:a="http://schemas.openxmlformats.org/drawingml/2006/main" xmlns:p="http://schemas.openxmlformats.org/presentationml/2006/main" xmlns:r="http://schemas.openxmlformats.org/officeDocument/2006/relationships">
+  <p:cSld>
+    <p:spTree>
+      <p:nvGrpSpPr>
+        <p:cNvPr id="1" name=""/>
+        <p:cNvGrpSpPr/>
+        <p:nvPr/>
+      </p:nvGrpSpPr>
+      <p:grpSpPr/>
+      <p:sp>
+        <p:nvSpPr>
+          <p:cNvPr id="2" name="TextBox 1"/>
+          <p:cNvSpPr txBox="1"/>
+          <p:nvPr/>
+        </p:nvSpPr>
+        <p:spPr>
+          <a:xfrm>
+            <a:off x="548640" y="411480"/>
+            <a:ext cx="11064240" cy="777240"/>
+          </a:xfrm>
+          <a:prstGeom prst="rect">
+            <a:avLst/>
+          </a:prstGeom>
+          <a:noFill/>
+        </p:spPr>
+        <p:txBody>
+          <a:bodyPr wrap="square">
+            <a:noAutofit/>
+          </a:bodyPr>
+          <a:lstStyle/>
+          <a:p>
+            <a:pPr>
+              <a:lnSpc>
+                <a:spcPts val="2200"/>
+              </a:lnSpc>
+            </a:pPr>
+            <a:r>
+              <a:rPr sz="2800" b="1">
+                <a:solidFill>
+                  <a:srgbClr val="1A1A2E"/>
+                </a:solidFill>
+                <a:latin typeface="Calibri"/>
+              </a:rPr>
+              <a:t>Your turn</a:t>
+            </a:r>
+          </a:p>
+        </p:txBody>
+      </p:sp>
+      <p:sp>
+        <p:nvSpPr>
+          <p:cNvPr id="3" name="TextBox 2"/>
+          <p:cNvSpPr txBox="1"/>
+          <p:nvPr/>
+        </p:nvSpPr>
+        <p:spPr>
+          <a:xfrm>
+            <a:off x="548640" y="1234440"/>
+            <a:ext cx="11064240" cy="4937760"/>
+          </a:xfrm>
+          <a:prstGeom prst="rect">
+            <a:avLst/>
+          </a:prstGeom>
+          <a:noFill/>
+        </p:spPr>
+        <p:txBody>
+          <a:bodyPr wrap="square">
+            <a:noAutofit/>
+          </a:bodyPr>
+          <a:lstStyle/>
+          <a:p>
+            <a:pPr lvl="0" marL="457200" indent="-228600">
+              <a:buFont typeface="Calibri"/>
+              <a:spcAft>
+                <a:spcPts val="1000"/>
+              </a:spcAft>
+              <a:buSzPct val="100000"/>
+              <a:buChar char="•"/>
+              <a:lnSpc>
+                <a:spcPts val="2200"/>
+              </a:lnSpc>
+            </a:pPr>
+            <a:r>
+              <a:rPr sz="2000" b="0">
+                <a:solidFill>
+                  <a:srgbClr val="333333"/>
+                </a:solidFill>
+                <a:latin typeface="Calibri"/>
+              </a:rPr>
+              <a:t>Pick a track: the browser lab, Python, or both</a:t>
+            </a:r>
+          </a:p>
+          <a:p>
+            <a:pPr lvl="0" marL="457200" indent="-228600">
+              <a:buFont typeface="Calibri"/>
+              <a:spcAft>
+                <a:spcPts val="1000"/>
+              </a:spcAft>
+              <a:buSzPct val="100000"/>
+              <a:buChar char="•"/>
+              <a:lnSpc>
+                <a:spcPts val="2200"/>
+              </a:lnSpc>
+            </a:pPr>
+            <a:r>
+              <a:rPr sz="2000" b="0">
+                <a:solidFill>
+                  <a:srgbClr val="333333"/>
+                </a:solidFill>
+                <a:latin typeface="Calibri"/>
+              </a:rPr>
+              <a:t>Tick each box of the checklist, then take the short quiz</a:t>
+            </a:r>
+          </a:p>
+          <a:p>
+            <a:pPr lvl="0" marL="457200" indent="-228600">
+              <a:buFont typeface="Calibri"/>
+              <a:spcAft>
+                <a:spcPts val="1000"/>
+              </a:spcAft>
+              <a:buSzPct val="100000"/>
+              <a:buChar char="•"/>
+              <a:lnSpc>
+                <a:spcPts val="2200"/>
+              </a:lnSpc>
+            </a:pPr>
+            <a:r>
+              <a:rPr sz="2000" b="0">
+                <a:solidFill>
+                  <a:srgbClr val="333333"/>
+                </a:solidFill>
+                <a:latin typeface="Calibri"/>
+              </a:rPr>
+              <a:t>Next comes Kernighan–Lin, which starts from your split and makes it better</a:t>
+            </a:r>
+          </a:p>
+          <a:p>
+            <a:pPr lvl="0" marL="457200" indent="-228600">
+              <a:buFont typeface="Calibri"/>
+              <a:spcAft>
+                <a:spcPts val="1000"/>
+              </a:spcAft>
+              <a:buSzPct val="100000"/>
+              <a:buChar char="•"/>
+              <a:lnSpc>
+                <a:spcPts val="2200"/>
+              </a:lnSpc>
+            </a:pPr>
+            <a:r>
+              <a:rPr sz="2000" b="0">
+                <a:solidFill>
+                  <a:srgbClr val="333333"/>
+                </a:solidFill>
+                <a:latin typeface="Calibri"/>
+              </a:rPr>
+              <a:t>Pause and guess: how much can it shrink the unlucky cut of sixteen?</a:t>
+            </a:r>
+          </a:p>
+          <a:p>
+            <a:pPr lvl="0" marL="457200" indent="-228600">
+              <a:buFont typeface="Calibri"/>
+              <a:spcAft>
+                <a:spcPts val="1000"/>
+              </a:spcAft>
+              <a:buSzPct val="100000"/>
+              <a:buChar char="•"/>
+              <a:lnSpc>
+                <a:spcPts val="2200"/>
+              </a:lnSpc>
+            </a:pPr>
+            <a:r>
+              <a:rPr sz="2000" b="0">
+                <a:solidFill>
+                  <a:srgbClr val="333333"/>
+                </a:solidFill>
+                <a:latin typeface="Calibri"/>
+              </a:rPr>
+              <a:t>Lab four will show you</a:t>
+            </a:r>
+          </a:p>
+        </p:txBody>
+      </p:sp>
+      <p:sp>
+        <p:nvSpPr>
+          <p:cNvPr id="4" name="TextBox 3"/>
           <p:cNvSpPr txBox="1"/>
           <p:nvPr/>
         </p:nvSpPr>
@@ -8665,7 +10345,7 @@
                 </a:solidFill>
                 <a:latin typeface="Calibri"/>
               </a:rPr>
-              <a:t>Why a starting split?</a:t>
+              <a:t>Two numbers: cut and balance</a:t>
             </a:r>
           </a:p>
         </p:txBody>
@@ -8679,7 +10359,7 @@
         <p:spPr>
           <a:xfrm>
             <a:off x="548640" y="1234440"/>
-            <a:ext cx="11064240" cy="4937760"/>
+            <a:ext cx="5303520" cy="4754880"/>
           </a:xfrm>
           <a:prstGeom prst="rect">
             <a:avLst/>
@@ -8710,7 +10390,7 @@
                 </a:solidFill>
                 <a:latin typeface="Calibri"/>
               </a:rPr>
-              <a:t>Labs four and five teach two famous methods, called KL and FM</a:t>
+              <a:t>Splitting the cells into two sides is called a bipartition</a:t>
             </a:r>
           </a:p>
           <a:p>
@@ -8732,7 +10412,7 @@
                 </a:solidFill>
                 <a:latin typeface="Calibri"/>
               </a:rPr>
-              <a:t>They improve a split by moving cells from one side to the other</a:t>
+              <a:t>Edges that cross between the two sides are cut, and drawn in red</a:t>
             </a:r>
           </a:p>
           <a:p>
@@ -8754,80 +10434,38 @@
                 </a:solidFill>
                 <a:latin typeface="Calibri"/>
               </a:rPr>
-              <a:t>But they can only improve: they need a legal split to start from</a:t>
-            </a:r>
-          </a:p>
-          <a:p>
-            <a:pPr lvl="0" marL="457200" indent="-228600">
-              <a:buFont typeface="Calibri"/>
-              <a:spcAft>
-                <a:spcPts val="1000"/>
-              </a:spcAft>
-              <a:buSzPct val="100000"/>
-              <a:buChar char="•"/>
-              <a:lnSpc>
-                <a:spcPts val="2200"/>
-              </a:lnSpc>
-            </a:pPr>
-            <a:r>
-              <a:rPr sz="2000" b="0">
-                <a:solidFill>
-                  <a:srgbClr val="333333"/>
-                </a:solidFill>
-                <a:latin typeface="Calibri"/>
-              </a:rPr>
-              <a:t>Think of picking two teams for a game</a:t>
-            </a:r>
-          </a:p>
-          <a:p>
-            <a:pPr lvl="0" marL="457200" indent="-228600">
-              <a:buFont typeface="Calibri"/>
-              <a:spcAft>
-                <a:spcPts val="1000"/>
-              </a:spcAft>
-              <a:buSzPct val="100000"/>
-              <a:buChar char="•"/>
-              <a:lnSpc>
-                <a:spcPts val="2200"/>
-              </a:lnSpc>
-            </a:pPr>
-            <a:r>
-              <a:rPr sz="2000" b="0">
-                <a:solidFill>
-                  <a:srgbClr val="333333"/>
-                </a:solidFill>
-                <a:latin typeface="Calibri"/>
-              </a:rPr>
-              <a:t>First you need any two teams, then you swap players to make the game fair</a:t>
-            </a:r>
-          </a:p>
-          <a:p>
-            <a:pPr lvl="0" marL="457200" indent="-228600">
-              <a:buFont typeface="Calibri"/>
-              <a:spcAft>
-                <a:spcPts val="1000"/>
-              </a:spcAft>
-              <a:buSzPct val="100000"/>
-              <a:buChar char="•"/>
-              <a:lnSpc>
-                <a:spcPts val="2200"/>
-              </a:lnSpc>
-            </a:pPr>
-            <a:r>
-              <a:rPr sz="2000" b="0">
-                <a:solidFill>
-                  <a:srgbClr val="333333"/>
-                </a:solidFill>
-                <a:latin typeface="Calibri"/>
-              </a:rPr>
-              <a:t>A good first split leaves less swapping to do</a:t>
-            </a:r>
-          </a:p>
-        </p:txBody>
-      </p:sp>
-      <p:sp>
-        <p:nvSpPr>
-          <p:cNvPr id="4" name="TextBox 3"/>
+              <a:t>The cutsize adds up their weights: here, two plus one makes three</a:t>
+            </a:r>
+          </a:p>
+        </p:txBody>
+      </p:sp>
+      <p:pic>
+        <p:nvPicPr>
+          <p:cNvPr id="4" name="Picture 3" descr="cut-and-balance-1.png"/>
+          <p:cNvPicPr>
+            <a:picLocks noChangeAspect="1"/>
+          </p:cNvPicPr>
+          <p:nvPr/>
+        </p:nvPicPr>
+        <p:blipFill>
+          <a:blip r:embed="rId2"/>
+          <a:stretch>
+            <a:fillRect/>
+          </a:stretch>
+        </p:blipFill>
+        <p:spPr>
+          <a:xfrm>
+            <a:off x="6172200" y="1234440"/>
+            <a:ext cx="4007853" cy="4754879"/>
+          </a:xfrm>
+          <a:prstGeom prst="rect">
+            <a:avLst/>
+          </a:prstGeom>
+        </p:spPr>
+      </p:pic>
+      <p:sp>
+        <p:nvSpPr>
+          <p:cNvPr id="5" name="TextBox 4"/>
           <p:cNvSpPr txBox="1"/>
           <p:nvPr/>
         </p:nvSpPr>
@@ -8916,14 +10554,103 @@
                 </a:solidFill>
                 <a:latin typeface="Calibri"/>
               </a:rPr>
-              <a:t>Need a legal starting split</a:t>
+              <a:t>Balance: no side too big</a:t>
+            </a:r>
+          </a:p>
+        </p:txBody>
+      </p:sp>
+      <p:sp>
+        <p:nvSpPr>
+          <p:cNvPr id="3" name="TextBox 2"/>
+          <p:cNvSpPr txBox="1"/>
+          <p:nvPr/>
+        </p:nvSpPr>
+        <p:spPr>
+          <a:xfrm>
+            <a:off x="548640" y="1234440"/>
+            <a:ext cx="5303520" cy="4754880"/>
+          </a:xfrm>
+          <a:prstGeom prst="rect">
+            <a:avLst/>
+          </a:prstGeom>
+          <a:noFill/>
+        </p:spPr>
+        <p:txBody>
+          <a:bodyPr wrap="square">
+            <a:noAutofit/>
+          </a:bodyPr>
+          <a:lstStyle/>
+          <a:p>
+            <a:pPr lvl="0" marL="457200" indent="-228600">
+              <a:buFont typeface="Calibri"/>
+              <a:spcAft>
+                <a:spcPts val="1000"/>
+              </a:spcAft>
+              <a:buSzPct val="100000"/>
+              <a:buChar char="•"/>
+              <a:lnSpc>
+                <a:spcPts val="2200"/>
+              </a:lnSpc>
+            </a:pPr>
+            <a:r>
+              <a:rPr sz="2000" b="0">
+                <a:solidFill>
+                  <a:srgbClr val="333333"/>
+                </a:solidFill>
+                <a:latin typeface="Calibri"/>
+              </a:rPr>
+              <a:t>Putting every cell on one side gives a cut of zero, but that split is useless</a:t>
+            </a:r>
+          </a:p>
+          <a:p>
+            <a:pPr lvl="0" marL="457200" indent="-228600">
+              <a:buFont typeface="Calibri"/>
+              <a:spcAft>
+                <a:spcPts val="1000"/>
+              </a:spcAft>
+              <a:buSzPct val="100000"/>
+              <a:buChar char="•"/>
+              <a:lnSpc>
+                <a:spcPts val="2200"/>
+              </a:lnSpc>
+            </a:pPr>
+            <a:r>
+              <a:rPr sz="2000" b="0">
+                <a:solidFill>
+                  <a:srgbClr val="333333"/>
+                </a:solidFill>
+                <a:latin typeface="Calibri"/>
+              </a:rPr>
+              <a:t>So we also check balance: how many cells each side holds</a:t>
+            </a:r>
+          </a:p>
+          <a:p>
+            <a:pPr lvl="0" marL="457200" indent="-228600">
+              <a:buFont typeface="Calibri"/>
+              <a:spcAft>
+                <a:spcPts val="1000"/>
+              </a:spcAft>
+              <a:buSzPct val="100000"/>
+              <a:buChar char="•"/>
+              <a:lnSpc>
+                <a:spcPts val="2200"/>
+              </a:lnSpc>
+            </a:pPr>
+            <a:r>
+              <a:rPr sz="2000" b="0">
+                <a:solidFill>
+                  <a:srgbClr val="333333"/>
+                </a:solidFill>
+                <a:latin typeface="Calibri"/>
+              </a:rPr>
+              <a:t>A split is legal when no side holds more than three of the five</a:t>
             </a:r>
           </a:p>
         </p:txBody>
       </p:sp>
       <p:pic>
         <p:nvPicPr>
-          <p:cNvPr id="3" name="Picture 2" descr="01-empty.png"/>
+          <p:cNvPr id="4" name="Picture 3" descr="cut-and-balance.png"/>
           <p:cNvPicPr>
             <a:picLocks noChangeAspect="1"/>
           </p:cNvPicPr>
@@ -8937,53 +10664,14 @@
         </p:blipFill>
         <p:spPr>
           <a:xfrm>
-            <a:off x="548640" y="1143000"/>
-            <a:ext cx="9183076" cy="4572000"/>
+            <a:off x="6172200" y="1234440"/>
+            <a:ext cx="4007853" cy="4754879"/>
           </a:xfrm>
           <a:prstGeom prst="rect">
             <a:avLst/>
           </a:prstGeom>
         </p:spPr>
       </p:pic>
-      <p:sp>
-        <p:nvSpPr>
-          <p:cNvPr id="4" name="TextBox 3"/>
-          <p:cNvSpPr txBox="1"/>
-          <p:nvPr/>
-        </p:nvSpPr>
-        <p:spPr>
-          <a:xfrm>
-            <a:off x="548640" y="5897880"/>
-            <a:ext cx="11064240" cy="411480"/>
-          </a:xfrm>
-          <a:prstGeom prst="rect">
-            <a:avLst/>
-          </a:prstGeom>
-          <a:noFill/>
-        </p:spPr>
-        <p:txBody>
-          <a:bodyPr wrap="square">
-            <a:noAutofit/>
-          </a:bodyPr>
-          <a:lstStyle/>
-          <a:p>
-            <a:pPr>
-              <a:lnSpc>
-                <a:spcPts val="2200"/>
-              </a:lnSpc>
-            </a:pPr>
-            <a:r>
-              <a:rPr sz="1200" b="0">
-                <a:solidFill>
-                  <a:srgbClr val="333333"/>
-                </a:solidFill>
-                <a:latin typeface="Calibri"/>
-              </a:rPr>
-              <a:t>Need a legal starting split</a:t>
-            </a:r>
-          </a:p>
-        </p:txBody>
-      </p:sp>
       <p:sp>
         <p:nvSpPr>
           <p:cNvPr id="5" name="TextBox 4"/>
@@ -9075,45 +10763,21 @@
                 </a:solidFill>
                 <a:latin typeface="Calibri"/>
               </a:rPr>
-              <a:t>Random seed 5: lucky ABC|DE cut 3</a:t>
-            </a:r>
-          </a:p>
-        </p:txBody>
-      </p:sp>
-      <p:pic>
-        <p:nvPicPr>
-          <p:cNvPr id="3" name="Picture 2" descr="02-random-lucky.png"/>
-          <p:cNvPicPr>
-            <a:picLocks noChangeAspect="1"/>
-          </p:cNvPicPr>
-          <p:nvPr/>
-        </p:nvPicPr>
-        <p:blipFill>
-          <a:blip r:embed="rId2"/>
-          <a:stretch>
-            <a:fillRect/>
-          </a:stretch>
-        </p:blipFill>
-        <p:spPr>
-          <a:xfrm>
-            <a:off x="548640" y="1143000"/>
-            <a:ext cx="9183076" cy="4572000"/>
-          </a:xfrm>
-          <a:prstGeom prst="rect">
-            <a:avLst/>
-          </a:prstGeom>
-        </p:spPr>
-      </p:pic>
-      <p:sp>
-        <p:nvSpPr>
-          <p:cNvPr id="4" name="TextBox 3"/>
+              <a:t>Why a starting split?</a:t>
+            </a:r>
+          </a:p>
+        </p:txBody>
+      </p:sp>
+      <p:sp>
+        <p:nvSpPr>
+          <p:cNvPr id="3" name="TextBox 2"/>
           <p:cNvSpPr txBox="1"/>
           <p:nvPr/>
         </p:nvSpPr>
         <p:spPr>
           <a:xfrm>
-            <a:off x="548640" y="5897880"/>
-            <a:ext cx="11064240" cy="411480"/>
+            <a:off x="548640" y="1234440"/>
+            <a:ext cx="11064240" cy="4937760"/>
           </a:xfrm>
           <a:prstGeom prst="rect">
             <a:avLst/>
@@ -9126,26 +10790,142 @@
           </a:bodyPr>
           <a:lstStyle/>
           <a:p>
-            <a:pPr>
-              <a:lnSpc>
-                <a:spcPts val="2200"/>
-              </a:lnSpc>
-            </a:pPr>
-            <a:r>
-              <a:rPr sz="1200" b="0">
+            <a:pPr lvl="0" marL="457200" indent="-228600">
+              <a:buFont typeface="Calibri"/>
+              <a:spcAft>
+                <a:spcPts val="1000"/>
+              </a:spcAft>
+              <a:buSzPct val="100000"/>
+              <a:buChar char="•"/>
+              <a:lnSpc>
+                <a:spcPts val="2200"/>
+              </a:lnSpc>
+            </a:pPr>
+            <a:r>
+              <a:rPr sz="2000" b="0">
                 <a:solidFill>
                   <a:srgbClr val="333333"/>
                 </a:solidFill>
                 <a:latin typeface="Calibri"/>
               </a:rPr>
-              <a:t>Random seed 5: lucky ABC|DE cut 3</a:t>
-            </a:r>
-          </a:p>
-        </p:txBody>
-      </p:sp>
-      <p:sp>
-        <p:nvSpPr>
-          <p:cNvPr id="5" name="TextBox 4"/>
+              <a:t>Labs four and five teach two famous methods, called KL and FM</a:t>
+            </a:r>
+          </a:p>
+          <a:p>
+            <a:pPr lvl="0" marL="457200" indent="-228600">
+              <a:buFont typeface="Calibri"/>
+              <a:spcAft>
+                <a:spcPts val="1000"/>
+              </a:spcAft>
+              <a:buSzPct val="100000"/>
+              <a:buChar char="•"/>
+              <a:lnSpc>
+                <a:spcPts val="2200"/>
+              </a:lnSpc>
+            </a:pPr>
+            <a:r>
+              <a:rPr sz="2000" b="0">
+                <a:solidFill>
+                  <a:srgbClr val="333333"/>
+                </a:solidFill>
+                <a:latin typeface="Calibri"/>
+              </a:rPr>
+              <a:t>They improve a split by moving cells from one side to the other</a:t>
+            </a:r>
+          </a:p>
+          <a:p>
+            <a:pPr lvl="0" marL="457200" indent="-228600">
+              <a:buFont typeface="Calibri"/>
+              <a:spcAft>
+                <a:spcPts val="1000"/>
+              </a:spcAft>
+              <a:buSzPct val="100000"/>
+              <a:buChar char="•"/>
+              <a:lnSpc>
+                <a:spcPts val="2200"/>
+              </a:lnSpc>
+            </a:pPr>
+            <a:r>
+              <a:rPr sz="2000" b="0">
+                <a:solidFill>
+                  <a:srgbClr val="333333"/>
+                </a:solidFill>
+                <a:latin typeface="Calibri"/>
+              </a:rPr>
+              <a:t>But KL and FM need a legal split to start from</a:t>
+            </a:r>
+          </a:p>
+          <a:p>
+            <a:pPr lvl="0" marL="457200" indent="-228600">
+              <a:buFont typeface="Calibri"/>
+              <a:spcAft>
+                <a:spcPts val="1000"/>
+              </a:spcAft>
+              <a:buSzPct val="100000"/>
+              <a:buChar char="•"/>
+              <a:lnSpc>
+                <a:spcPts val="2200"/>
+              </a:lnSpc>
+            </a:pPr>
+            <a:r>
+              <a:rPr sz="2000" b="0">
+                <a:solidFill>
+                  <a:srgbClr val="333333"/>
+                </a:solidFill>
+                <a:latin typeface="Calibri"/>
+              </a:rPr>
+              <a:t>Think of picking two teams: first any two teams, then swaps to make the game fair</a:t>
+            </a:r>
+          </a:p>
+          <a:p>
+            <a:pPr lvl="0" marL="457200" indent="-228600">
+              <a:buFont typeface="Calibri"/>
+              <a:spcAft>
+                <a:spcPts val="1000"/>
+              </a:spcAft>
+              <a:buSzPct val="100000"/>
+              <a:buChar char="•"/>
+              <a:lnSpc>
+                <a:spcPts val="2200"/>
+              </a:lnSpc>
+            </a:pPr>
+            <a:r>
+              <a:rPr sz="2000" b="0">
+                <a:solidFill>
+                  <a:srgbClr val="333333"/>
+                </a:solidFill>
+                <a:latin typeface="Calibri"/>
+              </a:rPr>
+              <a:t>A good first split leaves less swapping to do</a:t>
+            </a:r>
+          </a:p>
+          <a:p>
+            <a:pPr lvl="0" marL="457200" indent="-228600">
+              <a:buFont typeface="Calibri"/>
+              <a:spcAft>
+                <a:spcPts val="1000"/>
+              </a:spcAft>
+              <a:buSzPct val="100000"/>
+              <a:buChar char="•"/>
+              <a:lnSpc>
+                <a:spcPts val="2200"/>
+              </a:lnSpc>
+            </a:pPr>
+            <a:r>
+              <a:rPr sz="2000" b="0">
+                <a:solidFill>
+                  <a:srgbClr val="333333"/>
+                </a:solidFill>
+                <a:latin typeface="Calibri"/>
+              </a:rPr>
+              <a:t>Pause and guess: could a split made at random be as good as this one, with cut three?</a:t>
+            </a:r>
+          </a:p>
+        </p:txBody>
+      </p:sp>
+      <p:sp>
+        <p:nvSpPr>
+          <p:cNvPr id="4" name="TextBox 3"/>
           <p:cNvSpPr txBox="1"/>
           <p:nvPr/>
         </p:nvSpPr>
@@ -9234,14 +11014,14 @@
                 </a:solidFill>
                 <a:latin typeface="Calibri"/>
               </a:rPr>
-              <a:t>Greedy: ABC|DE cut 3</a:t>
+              <a:t>Three ways to build a first split</a:t>
             </a:r>
           </a:p>
         </p:txBody>
       </p:sp>
       <p:pic>
         <p:nvPicPr>
-          <p:cNvPr id="3" name="Picture 2" descr="03-greedy.png"/>
+          <p:cNvPr id="3" name="Picture 2" descr="01-empty.png"/>
           <p:cNvPicPr>
             <a:picLocks noChangeAspect="1"/>
           </p:cNvPicPr>
@@ -9297,7 +11077,7 @@
                 </a:solidFill>
                 <a:latin typeface="Calibri"/>
               </a:rPr>
-              <a:t>Greedy: ABC|DE cut 3</a:t>
+              <a:t>Three ways to build a first split</a:t>
             </a:r>
           </a:p>
         </p:txBody>
@@ -9393,14 +11173,14 @@
                 </a:solidFill>
                 <a:latin typeface="Calibri"/>
               </a:rPr>
-              <a:t>Grow from D: ABC|DE cut 3</a:t>
+              <a:t>Random seed 5: lucky ABC|DE cut 3</a:t>
             </a:r>
           </a:p>
         </p:txBody>
       </p:sp>
       <p:pic>
         <p:nvPicPr>
-          <p:cNvPr id="3" name="Picture 2" descr="04-grow-d.png"/>
+          <p:cNvPr id="3" name="Picture 2" descr="02-random-lucky.png"/>
           <p:cNvPicPr>
             <a:picLocks noChangeAspect="1"/>
           </p:cNvPicPr>
@@ -9456,7 +11236,7 @@
                 </a:solidFill>
                 <a:latin typeface="Calibri"/>
               </a:rPr>
-              <a:t>Grow from D: ABC|DE cut 3</a:t>
+              <a:t>Random seed 5: lucky ABC|DE cut 3</a:t>
             </a:r>
           </a:p>
         </p:txBody>
@@ -9552,14 +11332,14 @@
                 </a:solidFill>
                 <a:latin typeface="Calibri"/>
               </a:rPr>
-              <a:t>Try several starts, keep the best</a:t>
+              <a:t>Greedy: ABC|DE cut 3</a:t>
             </a:r>
           </a:p>
         </p:txBody>
       </p:sp>
       <p:pic>
         <p:nvPicPr>
-          <p:cNvPr id="3" name="Picture 2" descr="05-takeaway.png"/>
+          <p:cNvPr id="3" name="Picture 2" descr="03-greedy.png"/>
           <p:cNvPicPr>
             <a:picLocks noChangeAspect="1"/>
           </p:cNvPicPr>
@@ -9615,7 +11395,7 @@
                 </a:solidFill>
                 <a:latin typeface="Calibri"/>
               </a:rPr>
-              <a:t>Try several starts, keep the best</a:t>
+              <a:t>Greedy: ABC|DE cut 3</a:t>
             </a:r>
           </a:p>
         </p:txBody>
